--- a/연구코드/results/0424_vs_0430_comparison.pptx
+++ b/연구코드/results/0424_vs_0430_comparison.pptx
@@ -5369,7 +5369,7 @@
                             <a:srgbClr val="1A1A2E"/>
                           </a:solidFill>
                         </a:rPr>
-                        <a:t>0.8293</a:t>
+                        <a:t>0.7427</a:t>
                       </a:r>
                     </a:p>
                   </a:txBody>
@@ -5399,7 +5399,7 @@
                   </a:txBody>
                   <a:tcPr>
                     <a:solidFill>
-                      <a:srgbClr val="EBF5FF"/>
+                      <a:srgbClr val="EBFFEB"/>
                     </a:solidFill>
                   </a:tcPr>
                 </a:tc>
@@ -5421,7 +5421,7 @@
                   </a:txBody>
                   <a:tcPr>
                     <a:solidFill>
-                      <a:srgbClr val="EBF5FF"/>
+                      <a:srgbClr val="EBFFEB"/>
                     </a:solidFill>
                   </a:tcPr>
                 </a:tc>
@@ -5443,7 +5443,7 @@
                   </a:txBody>
                   <a:tcPr>
                     <a:solidFill>
-                      <a:srgbClr val="EBF5FF"/>
+                      <a:srgbClr val="EBFFEB"/>
                     </a:solidFill>
                   </a:tcPr>
                 </a:tc>
@@ -5459,13 +5459,13 @@
                             <a:srgbClr val="1A1A2E"/>
                           </a:solidFill>
                         </a:rPr>
-                        <a:t>0.8346</a:t>
+                        <a:t>0.7510</a:t>
                       </a:r>
                     </a:p>
                   </a:txBody>
                   <a:tcPr>
                     <a:solidFill>
-                      <a:srgbClr val="EBF5FF"/>
+                      <a:srgbClr val="EBFFEB"/>
                     </a:solidFill>
                   </a:tcPr>
                 </a:tc>
@@ -5484,96 +5484,6 @@
                           </a:solidFill>
                         </a:rPr>
                         <a:t>Case 3 +AEC_new</a:t>
-                      </a:r>
-                    </a:p>
-                  </a:txBody>
-                  <a:tcPr>
-                    <a:solidFill>
-                      <a:srgbClr val="FFF5EB"/>
-                    </a:solidFill>
-                  </a:tcPr>
-                </a:tc>
-                <a:tc>
-                  <a:txBody>
-                    <a:bodyPr/>
-                    <a:lstStyle/>
-                    <a:p>
-                      <a:pPr algn="ctr"/>
-                      <a:r>
-                        <a:rPr sz="1100" b="0">
-                          <a:solidFill>
-                            <a:srgbClr val="1A1A2E"/>
-                          </a:solidFill>
-                        </a:rPr>
-                        <a:t>0.6694</a:t>
-                      </a:r>
-                    </a:p>
-                  </a:txBody>
-                  <a:tcPr>
-                    <a:solidFill>
-                      <a:srgbClr val="FFF5EB"/>
-                    </a:solidFill>
-                  </a:tcPr>
-                </a:tc>
-                <a:tc>
-                  <a:txBody>
-                    <a:bodyPr/>
-                    <a:lstStyle/>
-                    <a:p>
-                      <a:pPr algn="ctr"/>
-                      <a:r>
-                        <a:rPr sz="1100" b="0">
-                          <a:solidFill>
-                            <a:srgbClr val="1A1A2E"/>
-                          </a:solidFill>
-                        </a:rPr>
-                        <a:t>16.93</a:t>
-                      </a:r>
-                    </a:p>
-                  </a:txBody>
-                  <a:tcPr>
-                    <a:solidFill>
-                      <a:srgbClr val="FFF5EB"/>
-                    </a:solidFill>
-                  </a:tcPr>
-                </a:tc>
-                <a:tc>
-                  <a:txBody>
-                    <a:bodyPr/>
-                    <a:lstStyle/>
-                    <a:p>
-                      <a:pPr algn="ctr"/>
-                      <a:r>
-                        <a:rPr sz="1100" b="0">
-                          <a:solidFill>
-                            <a:srgbClr val="1A1A2E"/>
-                          </a:solidFill>
-                        </a:rPr>
-                        <a:t>0.8352</a:t>
-                      </a:r>
-                    </a:p>
-                  </a:txBody>
-                  <a:tcPr>
-                    <a:solidFill>
-                      <a:srgbClr val="FFF5EB"/>
-                    </a:solidFill>
-                  </a:tcPr>
-                </a:tc>
-              </a:tr>
-              <a:tr h="365760">
-                <a:tc>
-                  <a:txBody>
-                    <a:bodyPr/>
-                    <a:lstStyle/>
-                    <a:p>
-                      <a:pPr algn="l"/>
-                      <a:r>
-                        <a:rPr sz="1100" b="0">
-                          <a:solidFill>
-                            <a:srgbClr val="1A1A2E"/>
-                          </a:solidFill>
-                        </a:rPr>
-                        <a:t>Case 4 +AEC_prev +Scanner</a:t>
                       </a:r>
                     </a:p>
                   </a:txBody>
@@ -5595,7 +5505,7 @@
                             <a:srgbClr val="1A1A2E"/>
                           </a:solidFill>
                         </a:rPr>
-                        <a:t>0.6682</a:t>
+                        <a:t>0.6694</a:t>
                       </a:r>
                     </a:p>
                   </a:txBody>
@@ -5617,7 +5527,7 @@
                             <a:srgbClr val="1A1A2E"/>
                           </a:solidFill>
                         </a:rPr>
-                        <a:t>16.96</a:t>
+                        <a:t>16.93</a:t>
                       </a:r>
                     </a:p>
                   </a:txBody>
@@ -5639,7 +5549,7 @@
                             <a:srgbClr val="1A1A2E"/>
                           </a:solidFill>
                         </a:rPr>
-                        <a:t>0.8306</a:t>
+                        <a:t>0.7442</a:t>
                       </a:r>
                     </a:p>
                   </a:txBody>
@@ -5663,7 +5573,7 @@
                             <a:srgbClr val="1A1A2E"/>
                           </a:solidFill>
                         </a:rPr>
-                        <a:t>Case 5 +AEC_new +Scanner</a:t>
+                        <a:t>Case 4 +AEC_prev +Scanner</a:t>
                       </a:r>
                     </a:p>
                   </a:txBody>
@@ -5685,7 +5595,7 @@
                             <a:srgbClr val="1A1A2E"/>
                           </a:solidFill>
                         </a:rPr>
-                        <a:t>0.6620</a:t>
+                        <a:t>0.6682</a:t>
                       </a:r>
                     </a:p>
                   </a:txBody>
@@ -5707,7 +5617,7 @@
                             <a:srgbClr val="1A1A2E"/>
                           </a:solidFill>
                         </a:rPr>
-                        <a:t>17.11</a:t>
+                        <a:t>16.96</a:t>
                       </a:r>
                     </a:p>
                   </a:txBody>
@@ -5729,7 +5639,97 @@
                             <a:srgbClr val="1A1A2E"/>
                           </a:solidFill>
                         </a:rPr>
-                        <a:t>0.8320</a:t>
+                        <a:t>0.7400</a:t>
+                      </a:r>
+                    </a:p>
+                  </a:txBody>
+                  <a:tcPr>
+                    <a:solidFill>
+                      <a:srgbClr val="F8F8F8"/>
+                    </a:solidFill>
+                  </a:tcPr>
+                </a:tc>
+              </a:tr>
+              <a:tr h="365760">
+                <a:tc>
+                  <a:txBody>
+                    <a:bodyPr/>
+                    <a:lstStyle/>
+                    <a:p>
+                      <a:pPr algn="l"/>
+                      <a:r>
+                        <a:rPr sz="1100" b="0">
+                          <a:solidFill>
+                            <a:srgbClr val="1A1A2E"/>
+                          </a:solidFill>
+                        </a:rPr>
+                        <a:t>Case 5 +AEC_new +Scanner</a:t>
+                      </a:r>
+                    </a:p>
+                  </a:txBody>
+                  <a:tcPr>
+                    <a:solidFill>
+                      <a:srgbClr val="F8F8F8"/>
+                    </a:solidFill>
+                  </a:tcPr>
+                </a:tc>
+                <a:tc>
+                  <a:txBody>
+                    <a:bodyPr/>
+                    <a:lstStyle/>
+                    <a:p>
+                      <a:pPr algn="ctr"/>
+                      <a:r>
+                        <a:rPr sz="1100" b="0">
+                          <a:solidFill>
+                            <a:srgbClr val="1A1A2E"/>
+                          </a:solidFill>
+                        </a:rPr>
+                        <a:t>0.6620</a:t>
+                      </a:r>
+                    </a:p>
+                  </a:txBody>
+                  <a:tcPr>
+                    <a:solidFill>
+                      <a:srgbClr val="F8F8F8"/>
+                    </a:solidFill>
+                  </a:tcPr>
+                </a:tc>
+                <a:tc>
+                  <a:txBody>
+                    <a:bodyPr/>
+                    <a:lstStyle/>
+                    <a:p>
+                      <a:pPr algn="ctr"/>
+                      <a:r>
+                        <a:rPr sz="1100" b="0">
+                          <a:solidFill>
+                            <a:srgbClr val="1A1A2E"/>
+                          </a:solidFill>
+                        </a:rPr>
+                        <a:t>17.11</a:t>
+                      </a:r>
+                    </a:p>
+                  </a:txBody>
+                  <a:tcPr>
+                    <a:solidFill>
+                      <a:srgbClr val="F8F8F8"/>
+                    </a:solidFill>
+                  </a:tcPr>
+                </a:tc>
+                <a:tc>
+                  <a:txBody>
+                    <a:bodyPr/>
+                    <a:lstStyle/>
+                    <a:p>
+                      <a:pPr algn="ctr"/>
+                      <a:r>
+                        <a:rPr sz="1100" b="0">
+                          <a:solidFill>
+                            <a:srgbClr val="1A1A2E"/>
+                          </a:solidFill>
+                        </a:rPr>
+                        <a:t>0.7311</a:t>
                       </a:r>
                     </a:p>
                   </a:txBody>
@@ -5850,7 +5850,7 @@
                   <a:srgbClr val="2E75B6"/>
                 </a:solidFill>
               </a:rPr>
-              <a:t>Lin R² +0.0160  |  AUC +0.0053</a:t>
+              <a:t>Lin R² +0.0160  |  AUC +0.0083</a:t>
             </a:r>
           </a:p>
         </p:txBody>
@@ -5918,7 +5918,7 @@
                   <a:srgbClr val="008B45"/>
                 </a:solidFill>
               </a:rPr>
-              <a:t>Lin R² +0.0074  |  AUC +0.0059</a:t>
+              <a:t>Lin R² +0.0074  |  AUC +0.0015</a:t>
             </a:r>
           </a:p>
         </p:txBody>
@@ -12315,7 +12315,7 @@
                             <a:srgbClr val="1A1A2E"/>
                           </a:solidFill>
                         </a:rPr>
-                        <a:t>+0.0649</a:t>
+                        <a:t>+0.1435</a:t>
                       </a:r>
                     </a:p>
                   </a:txBody>
@@ -12337,7 +12337,7 @@
                             <a:srgbClr val="1A1A2E"/>
                           </a:solidFill>
                         </a:rPr>
-                        <a:t>+0.0168</a:t>
+                        <a:t>-0.0410</a:t>
                       </a:r>
                     </a:p>
                   </a:txBody>
@@ -12449,7 +12449,7 @@
                             <a:srgbClr val="1A1A2E"/>
                           </a:solidFill>
                         </a:rPr>
-                        <a:t>+0.0168</a:t>
+                        <a:t>+0.0510</a:t>
                       </a:r>
                     </a:p>
                   </a:txBody>
@@ -12471,7 +12471,7 @@
                             <a:srgbClr val="1A1A2E"/>
                           </a:solidFill>
                         </a:rPr>
-                        <a:t>+0.0146</a:t>
+                        <a:t>+0.0806</a:t>
                       </a:r>
                     </a:p>
                   </a:txBody>
@@ -12583,7 +12583,7 @@
                             <a:srgbClr val="1A1A2E"/>
                           </a:solidFill>
                         </a:rPr>
-                        <a:t>+0.0152</a:t>
+                        <a:t>+0.0296</a:t>
                       </a:r>
                     </a:p>
                   </a:txBody>
@@ -12605,7 +12605,7 @@
                             <a:srgbClr val="1A1A2E"/>
                           </a:solidFill>
                         </a:rPr>
-                        <a:t>+0.0073</a:t>
+                        <a:t>+0.0330</a:t>
                       </a:r>
                     </a:p>
                   </a:txBody>
@@ -12717,7 +12717,7 @@
                             <a:srgbClr val="1A1A2E"/>
                           </a:solidFill>
                         </a:rPr>
-                        <a:t>+0.0560</a:t>
+                        <a:t>+0.1437</a:t>
                       </a:r>
                     </a:p>
                   </a:txBody>
@@ -12739,7 +12739,7 @@
                             <a:srgbClr val="1A1A2E"/>
                           </a:solidFill>
                         </a:rPr>
-                        <a:t>+0.0528</a:t>
+                        <a:t>-0.0047</a:t>
                       </a:r>
                     </a:p>
                   </a:txBody>
@@ -12851,7 +12851,7 @@
                             <a:srgbClr val="1A1A2E"/>
                           </a:solidFill>
                         </a:rPr>
-                        <a:t>+0.0381</a:t>
+                        <a:t>+0.1061</a:t>
                       </a:r>
                     </a:p>
                   </a:txBody>
@@ -12873,7 +12873,7 @@
                             <a:srgbClr val="1A1A2E"/>
                           </a:solidFill>
                         </a:rPr>
-                        <a:t>+0.0197</a:t>
+                        <a:t>+0.0150</a:t>
                       </a:r>
                     </a:p>
                   </a:txBody>
@@ -12985,7 +12985,7 @@
                             <a:srgbClr val="1A1A2E"/>
                           </a:solidFill>
                         </a:rPr>
-                        <a:t>+0.0237</a:t>
+                        <a:t>+0.0745</a:t>
                       </a:r>
                     </a:p>
                   </a:txBody>
@@ -13007,7 +13007,7 @@
                             <a:srgbClr val="1A1A2E"/>
                           </a:solidFill>
                         </a:rPr>
-                        <a:t>+0.0149</a:t>
+                        <a:t>+0.0403</a:t>
                       </a:r>
                     </a:p>
                   </a:txBody>

--- a/연구코드/results/0424_vs_0430_comparison.pptx
+++ b/연구코드/results/0424_vs_0430_comparison.pptx
@@ -18,7 +18,6 @@
     <p:sldId id="266" r:id="rId17"/>
     <p:sldId id="267" r:id="rId18"/>
     <p:sldId id="268" r:id="rId19"/>
-    <p:sldId id="269" r:id="rId20"/>
   </p:sldIdLst>
   <p:sldSz cx="12188952" cy="6858000" type="screen4x3"/>
   <p:notesSz cx="6858000" cy="9144000"/>
@@ -3385,7 +3384,7 @@
                   <a:srgbClr val="1A1A2E"/>
                 </a:solidFill>
               </a:rPr>
-              <a:t>④ 성별 층화 분석 신설 (전체 / 여성 / 남성)</a:t>
+              <a:t>④ 다병원 자동 순회 + 교차 병원 비교</a:t>
             </a:r>
           </a:p>
         </p:txBody>
@@ -3393,40 +3392,6 @@
       <p:sp>
         <p:nvSpPr>
           <p:cNvPr id="10" name="TextBox 9"/>
-          <p:cNvSpPr txBox="1"/>
-          <p:nvPr/>
-        </p:nvSpPr>
-        <p:spPr>
-          <a:xfrm>
-            <a:off x="1920240" y="5148072"/>
-            <a:ext cx="8229600" cy="274320"/>
-          </a:xfrm>
-          <a:prstGeom prst="rect">
-            <a:avLst/>
-          </a:prstGeom>
-          <a:noFill/>
-        </p:spPr>
-        <p:txBody>
-          <a:bodyPr wrap="square">
-            <a:spAutoFit/>
-          </a:bodyPr>
-          <a:lstStyle/>
-          <a:p>
-            <a:pPr algn="l"/>
-            <a:r>
-              <a:rPr sz="1300" b="0" i="0">
-                <a:solidFill>
-                  <a:srgbClr val="1A1A2E"/>
-                </a:solidFill>
-              </a:rPr>
-              <a:t>⑤ 다병원 자동 순회 + 교차 병원 비교</a:t>
-            </a:r>
-          </a:p>
-        </p:txBody>
-      </p:sp>
-      <p:sp>
-        <p:nvSpPr>
-          <p:cNvPr id="11" name="TextBox 10"/>
           <p:cNvSpPr txBox="1"/>
           <p:nvPr/>
         </p:nvSpPr>
@@ -3556,7 +3521,7 @@
                   <a:srgbClr val="FFFFFF"/>
                 </a:solidFill>
               </a:rPr>
-              <a:t>⑤ 다병원 자동 순회 + 교차 병원 비교</a:t>
+              <a:t>선형 회귀 결과 (강남 – 전체)</a:t>
             </a:r>
           </a:p>
         </p:txBody>
@@ -3590,107 +3555,21 @@
                   <a:srgbClr val="BDD7EE"/>
                 </a:solidFill>
               </a:rPr>
-              <a:t>0424: 강남 단독  →  0430: 강남·신촌 자동 순회 + 외부 검증</a:t>
-            </a:r>
-          </a:p>
-        </p:txBody>
-      </p:sp>
-      <p:sp>
-        <p:nvSpPr>
-          <p:cNvPr id="5" name="Rectangle 4"/>
-          <p:cNvSpPr/>
-          <p:nvPr/>
-        </p:nvSpPr>
-        <p:spPr>
-          <a:xfrm>
-            <a:off x="182880" y="1097280"/>
-            <a:ext cx="4572000" cy="5303520"/>
-          </a:xfrm>
-          <a:prstGeom prst="rect">
-            <a:avLst/>
-          </a:prstGeom>
-          <a:solidFill>
-            <a:srgbClr val="F5F5FF"/>
-          </a:solidFill>
-          <a:ln>
-            <a:noFill/>
-          </a:ln>
-        </p:spPr>
-        <p:style>
-          <a:lnRef idx="1">
-            <a:schemeClr val="accent1"/>
-          </a:lnRef>
-          <a:fillRef idx="3">
-            <a:schemeClr val="accent1"/>
-          </a:fillRef>
-          <a:effectRef idx="2">
-            <a:schemeClr val="accent1"/>
-          </a:effectRef>
-          <a:fontRef idx="minor">
-            <a:schemeClr val="lt1"/>
-          </a:fontRef>
-        </p:style>
-        <p:txBody>
-          <a:bodyPr rtlCol="0" anchor="ctr"/>
-          <a:lstStyle/>
-          <a:p>
-            <a:pPr algn="ctr"/>
-          </a:p>
-        </p:txBody>
-      </p:sp>
-      <p:sp>
-        <p:nvSpPr>
-          <p:cNvPr id="6" name="Rectangle 5"/>
-          <p:cNvSpPr/>
-          <p:nvPr/>
-        </p:nvSpPr>
-        <p:spPr>
-          <a:xfrm>
-            <a:off x="320040" y="1170432"/>
-            <a:ext cx="1097280" cy="320040"/>
-          </a:xfrm>
-          <a:prstGeom prst="rect">
-            <a:avLst/>
-          </a:prstGeom>
-          <a:solidFill>
-            <a:srgbClr val="C00000"/>
-          </a:solidFill>
-          <a:ln>
-            <a:noFill/>
-          </a:ln>
-        </p:spPr>
-        <p:style>
-          <a:lnRef idx="1">
-            <a:schemeClr val="accent1"/>
-          </a:lnRef>
-          <a:fillRef idx="3">
-            <a:schemeClr val="accent1"/>
-          </a:fillRef>
-          <a:effectRef idx="2">
-            <a:schemeClr val="accent1"/>
-          </a:effectRef>
-          <a:fontRef idx="minor">
-            <a:schemeClr val="lt1"/>
-          </a:fontRef>
-        </p:style>
-        <p:txBody>
-          <a:bodyPr rtlCol="0" anchor="ctr"/>
-          <a:lstStyle/>
-          <a:p>
-            <a:pPr algn="ctr"/>
-          </a:p>
-        </p:txBody>
-      </p:sp>
-      <p:sp>
-        <p:nvSpPr>
-          <p:cNvPr id="7" name="TextBox 6"/>
+              <a:t>Actual vs Predicted  |  계수 (Coeff)</a:t>
+            </a:r>
+          </a:p>
+        </p:txBody>
+      </p:sp>
+      <p:sp>
+        <p:nvSpPr>
+          <p:cNvPr id="5" name="TextBox 4"/>
           <p:cNvSpPr txBox="1"/>
           <p:nvPr/>
         </p:nvSpPr>
         <p:spPr>
           <a:xfrm>
-            <a:off x="365759" y="1188720"/>
-            <a:ext cx="1005839" cy="283464"/>
+            <a:off x="182880" y="1005840"/>
+            <a:ext cx="5943600" cy="320040"/>
           </a:xfrm>
           <a:prstGeom prst="rect">
             <a:avLst/>
@@ -3703,549 +3582,21 @@
           </a:bodyPr>
           <a:lstStyle/>
           <a:p>
-            <a:pPr algn="ctr"/>
-            <a:r>
-              <a:rPr sz="1300" b="1" i="0">
-                <a:solidFill>
-                  <a:srgbClr val="FFFFFF"/>
+            <a:pPr algn="l"/>
+            <a:r>
+              <a:rPr sz="1200" b="1" i="0">
+                <a:solidFill>
+                  <a:srgbClr val="1A355E"/>
                 </a:solidFill>
               </a:rPr>
-              <a:t>0424</a:t>
-            </a:r>
-          </a:p>
-        </p:txBody>
-      </p:sp>
-      <p:sp>
-        <p:nvSpPr>
-          <p:cNvPr id="8" name="TextBox 7"/>
-          <p:cNvSpPr txBox="1"/>
-          <p:nvPr/>
-        </p:nvSpPr>
-        <p:spPr>
-          <a:xfrm>
-            <a:off x="365760" y="1554480"/>
-            <a:ext cx="4297680" cy="301752"/>
-          </a:xfrm>
-          <a:prstGeom prst="rect">
-            <a:avLst/>
-          </a:prstGeom>
-          <a:noFill/>
-        </p:spPr>
-        <p:txBody>
-          <a:bodyPr wrap="square">
-            <a:spAutoFit/>
-          </a:bodyPr>
-          <a:lstStyle/>
-          <a:p>
-            <a:pPr algn="l"/>
-            <a:r>
-              <a:rPr sz="1200" b="0" i="0">
-                <a:solidFill>
-                  <a:srgbClr val="1A1A2E"/>
-                </a:solidFill>
-              </a:rPr>
-              <a:t>• config.py의 SITE 변수를</a:t>
-            </a:r>
-          </a:p>
-        </p:txBody>
-      </p:sp>
-      <p:sp>
-        <p:nvSpPr>
-          <p:cNvPr id="9" name="TextBox 8"/>
-          <p:cNvSpPr txBox="1"/>
-          <p:nvPr/>
-        </p:nvSpPr>
-        <p:spPr>
-          <a:xfrm>
-            <a:off x="365760" y="1856231"/>
-            <a:ext cx="4297680" cy="301752"/>
-          </a:xfrm>
-          <a:prstGeom prst="rect">
-            <a:avLst/>
-          </a:prstGeom>
-          <a:noFill/>
-        </p:spPr>
-        <p:txBody>
-          <a:bodyPr wrap="square">
-            <a:spAutoFit/>
-          </a:bodyPr>
-          <a:lstStyle/>
-          <a:p>
-            <a:pPr algn="l"/>
-            <a:r>
-              <a:rPr sz="1200" b="0" i="0">
-                <a:solidFill>
-                  <a:srgbClr val="1A1A2E"/>
-                </a:solidFill>
-              </a:rPr>
-              <a:t>  연구자가 수동 변경</a:t>
-            </a:r>
-          </a:p>
-        </p:txBody>
-      </p:sp>
-      <p:sp>
-        <p:nvSpPr>
-          <p:cNvPr id="10" name="TextBox 9"/>
-          <p:cNvSpPr txBox="1"/>
-          <p:nvPr/>
-        </p:nvSpPr>
-        <p:spPr>
-          <a:xfrm>
-            <a:off x="365760" y="2157984"/>
-            <a:ext cx="4297680" cy="301752"/>
-          </a:xfrm>
-          <a:prstGeom prst="rect">
-            <a:avLst/>
-          </a:prstGeom>
-          <a:noFill/>
-        </p:spPr>
-        <p:txBody>
-          <a:bodyPr wrap="square">
-            <a:spAutoFit/>
-          </a:bodyPr>
-          <a:lstStyle/>
-          <a:p>
-            <a:pPr algn="l"/>
-            <a:r>
-              <a:rPr sz="1200" b="0" i="0">
-                <a:solidFill>
-                  <a:srgbClr val="1A1A2E"/>
-                </a:solidFill>
-              </a:rPr>
-              <a:t>• 강남만 분석 (신촌 별도 실행 필요)</a:t>
-            </a:r>
-          </a:p>
-        </p:txBody>
-      </p:sp>
-      <p:sp>
-        <p:nvSpPr>
-          <p:cNvPr id="11" name="TextBox 10"/>
-          <p:cNvSpPr txBox="1"/>
-          <p:nvPr/>
-        </p:nvSpPr>
-        <p:spPr>
-          <a:xfrm>
-            <a:off x="365760" y="2459736"/>
-            <a:ext cx="4297680" cy="301752"/>
-          </a:xfrm>
-          <a:prstGeom prst="rect">
-            <a:avLst/>
-          </a:prstGeom>
-          <a:noFill/>
-        </p:spPr>
-        <p:txBody>
-          <a:bodyPr wrap="square">
-            <a:spAutoFit/>
-          </a:bodyPr>
-          <a:lstStyle/>
-          <a:p>
-            <a:pPr algn="l"/>
-            <a:r>
-              <a:rPr sz="1200" b="0" i="0">
-                <a:solidFill>
-                  <a:srgbClr val="1A1A2E"/>
-                </a:solidFill>
-              </a:rPr>
-              <a:t>• 재현성 비교 구조 없음</a:t>
-            </a:r>
-          </a:p>
-        </p:txBody>
-      </p:sp>
-      <p:sp>
-        <p:nvSpPr>
-          <p:cNvPr id="12" name="Rectangle 11"/>
-          <p:cNvSpPr/>
-          <p:nvPr/>
-        </p:nvSpPr>
-        <p:spPr>
-          <a:xfrm>
-            <a:off x="182880" y="2926080"/>
-            <a:ext cx="4572000" cy="3474720"/>
-          </a:xfrm>
-          <a:prstGeom prst="rect">
-            <a:avLst/>
-          </a:prstGeom>
-          <a:solidFill>
-            <a:srgbClr val="F0FFF0"/>
-          </a:solidFill>
-          <a:ln>
-            <a:noFill/>
-          </a:ln>
-        </p:spPr>
-        <p:style>
-          <a:lnRef idx="1">
-            <a:schemeClr val="accent1"/>
-          </a:lnRef>
-          <a:fillRef idx="3">
-            <a:schemeClr val="accent1"/>
-          </a:fillRef>
-          <a:effectRef idx="2">
-            <a:schemeClr val="accent1"/>
-          </a:effectRef>
-          <a:fontRef idx="minor">
-            <a:schemeClr val="lt1"/>
-          </a:fontRef>
-        </p:style>
-        <p:txBody>
-          <a:bodyPr rtlCol="0" anchor="ctr"/>
-          <a:lstStyle/>
-          <a:p>
-            <a:pPr algn="ctr"/>
-          </a:p>
-        </p:txBody>
-      </p:sp>
-      <p:sp>
-        <p:nvSpPr>
-          <p:cNvPr id="13" name="Rectangle 12"/>
-          <p:cNvSpPr/>
-          <p:nvPr/>
-        </p:nvSpPr>
-        <p:spPr>
-          <a:xfrm>
-            <a:off x="320040" y="2999232"/>
-            <a:ext cx="1097280" cy="320040"/>
-          </a:xfrm>
-          <a:prstGeom prst="rect">
-            <a:avLst/>
-          </a:prstGeom>
-          <a:solidFill>
-            <a:srgbClr val="008B45"/>
-          </a:solidFill>
-          <a:ln>
-            <a:noFill/>
-          </a:ln>
-        </p:spPr>
-        <p:style>
-          <a:lnRef idx="1">
-            <a:schemeClr val="accent1"/>
-          </a:lnRef>
-          <a:fillRef idx="3">
-            <a:schemeClr val="accent1"/>
-          </a:fillRef>
-          <a:effectRef idx="2">
-            <a:schemeClr val="accent1"/>
-          </a:effectRef>
-          <a:fontRef idx="minor">
-            <a:schemeClr val="lt1"/>
-          </a:fontRef>
-        </p:style>
-        <p:txBody>
-          <a:bodyPr rtlCol="0" anchor="ctr"/>
-          <a:lstStyle/>
-          <a:p>
-            <a:pPr algn="ctr"/>
-          </a:p>
-        </p:txBody>
-      </p:sp>
-      <p:sp>
-        <p:nvSpPr>
-          <p:cNvPr id="14" name="TextBox 13"/>
-          <p:cNvSpPr txBox="1"/>
-          <p:nvPr/>
-        </p:nvSpPr>
-        <p:spPr>
-          <a:xfrm>
-            <a:off x="365759" y="3017520"/>
-            <a:ext cx="1005839" cy="283464"/>
-          </a:xfrm>
-          <a:prstGeom prst="rect">
-            <a:avLst/>
-          </a:prstGeom>
-          <a:noFill/>
-        </p:spPr>
-        <p:txBody>
-          <a:bodyPr wrap="square">
-            <a:spAutoFit/>
-          </a:bodyPr>
-          <a:lstStyle/>
-          <a:p>
-            <a:pPr algn="ctr"/>
-            <a:r>
-              <a:rPr sz="1300" b="1" i="0">
-                <a:solidFill>
-                  <a:srgbClr val="FFFFFF"/>
-                </a:solidFill>
-              </a:rPr>
-              <a:t>0430</a:t>
-            </a:r>
-          </a:p>
-        </p:txBody>
-      </p:sp>
-      <p:sp>
-        <p:nvSpPr>
-          <p:cNvPr id="15" name="TextBox 14"/>
-          <p:cNvSpPr txBox="1"/>
-          <p:nvPr/>
-        </p:nvSpPr>
-        <p:spPr>
-          <a:xfrm>
-            <a:off x="365760" y="3383280"/>
-            <a:ext cx="4297680" cy="301752"/>
-          </a:xfrm>
-          <a:prstGeom prst="rect">
-            <a:avLst/>
-          </a:prstGeom>
-          <a:noFill/>
-        </p:spPr>
-        <p:txBody>
-          <a:bodyPr wrap="square">
-            <a:spAutoFit/>
-          </a:bodyPr>
-          <a:lstStyle/>
-          <a:p>
-            <a:pPr algn="l"/>
-            <a:r>
-              <a:rPr sz="1200" b="0" i="0">
-                <a:solidFill>
-                  <a:srgbClr val="1A1A2E"/>
-                </a:solidFill>
-              </a:rPr>
-              <a:t>• data/ 폴더 자동 스캔</a:t>
-            </a:r>
-          </a:p>
-        </p:txBody>
-      </p:sp>
-      <p:sp>
-        <p:nvSpPr>
-          <p:cNvPr id="16" name="TextBox 15"/>
-          <p:cNvSpPr txBox="1"/>
-          <p:nvPr/>
-        </p:nvSpPr>
-        <p:spPr>
-          <a:xfrm>
-            <a:off x="365760" y="3685032"/>
-            <a:ext cx="4297680" cy="301752"/>
-          </a:xfrm>
-          <a:prstGeom prst="rect">
-            <a:avLst/>
-          </a:prstGeom>
-          <a:noFill/>
-        </p:spPr>
-        <p:txBody>
-          <a:bodyPr wrap="square">
-            <a:spAutoFit/>
-          </a:bodyPr>
-          <a:lstStyle/>
-          <a:p>
-            <a:pPr algn="l"/>
-            <a:r>
-              <a:rPr sz="1200" b="0" i="0">
-                <a:solidFill>
-                  <a:srgbClr val="1A1A2E"/>
-                </a:solidFill>
-              </a:rPr>
-              <a:t>  강남·신촌 모두 순회</a:t>
-            </a:r>
-          </a:p>
-        </p:txBody>
-      </p:sp>
-      <p:sp>
-        <p:nvSpPr>
-          <p:cNvPr id="17" name="TextBox 16"/>
-          <p:cNvSpPr txBox="1"/>
-          <p:nvPr/>
-        </p:nvSpPr>
-        <p:spPr>
-          <a:xfrm>
-            <a:off x="365760" y="3986784"/>
-            <a:ext cx="4297680" cy="301752"/>
-          </a:xfrm>
-          <a:prstGeom prst="rect">
-            <a:avLst/>
-          </a:prstGeom>
-          <a:noFill/>
-        </p:spPr>
-        <p:txBody>
-          <a:bodyPr wrap="square">
-            <a:spAutoFit/>
-          </a:bodyPr>
-          <a:lstStyle/>
-          <a:p>
-            <a:pPr algn="l"/>
-            <a:r>
-              <a:rPr sz="1200" b="0" i="0">
-                <a:solidFill>
-                  <a:srgbClr val="1A1A2E"/>
-                </a:solidFill>
-              </a:rPr>
-              <a:t>• 강남 학습 → 신촌 외부 검증</a:t>
-            </a:r>
-          </a:p>
-        </p:txBody>
-      </p:sp>
-      <p:sp>
-        <p:nvSpPr>
-          <p:cNvPr id="18" name="TextBox 17"/>
-          <p:cNvSpPr txBox="1"/>
-          <p:nvPr/>
-        </p:nvSpPr>
-        <p:spPr>
-          <a:xfrm>
-            <a:off x="365760" y="4288536"/>
-            <a:ext cx="4297680" cy="301752"/>
-          </a:xfrm>
-          <a:prstGeom prst="rect">
-            <a:avLst/>
-          </a:prstGeom>
-          <a:noFill/>
-        </p:spPr>
-        <p:txBody>
-          <a:bodyPr wrap="square">
-            <a:spAutoFit/>
-          </a:bodyPr>
-          <a:lstStyle/>
-          <a:p>
-            <a:pPr algn="l"/>
-            <a:r>
-              <a:rPr sz="1200" b="0" i="0">
-                <a:solidFill>
-                  <a:srgbClr val="1A1A2E"/>
-                </a:solidFill>
-              </a:rPr>
-              <a:t>  (Cross-hospital validation)</a:t>
-            </a:r>
-          </a:p>
-        </p:txBody>
-      </p:sp>
-      <p:sp>
-        <p:nvSpPr>
-          <p:cNvPr id="19" name="TextBox 18"/>
-          <p:cNvSpPr txBox="1"/>
-          <p:nvPr/>
-        </p:nvSpPr>
-        <p:spPr>
-          <a:xfrm>
-            <a:off x="365760" y="4590288"/>
-            <a:ext cx="4297680" cy="301752"/>
-          </a:xfrm>
-          <a:prstGeom prst="rect">
-            <a:avLst/>
-          </a:prstGeom>
-          <a:noFill/>
-        </p:spPr>
-        <p:txBody>
-          <a:bodyPr wrap="square">
-            <a:spAutoFit/>
-          </a:bodyPr>
-          <a:lstStyle/>
-          <a:p>
-            <a:pPr algn="l"/>
-            <a:r>
-              <a:rPr sz="1200" b="0" i="0">
-                <a:solidFill>
-                  <a:srgbClr val="1A1A2E"/>
-                </a:solidFill>
-              </a:rPr>
-              <a:t>• 피처 선택도 3개 데이터셋 독립 실행:</a:t>
-            </a:r>
-          </a:p>
-        </p:txBody>
-      </p:sp>
-      <p:sp>
-        <p:nvSpPr>
-          <p:cNvPr id="20" name="TextBox 19"/>
-          <p:cNvSpPr txBox="1"/>
-          <p:nvPr/>
-        </p:nvSpPr>
-        <p:spPr>
-          <a:xfrm>
-            <a:off x="365760" y="4892040"/>
-            <a:ext cx="4297680" cy="301752"/>
-          </a:xfrm>
-          <a:prstGeom prst="rect">
-            <a:avLst/>
-          </a:prstGeom>
-          <a:noFill/>
-        </p:spPr>
-        <p:txBody>
-          <a:bodyPr wrap="square">
-            <a:spAutoFit/>
-          </a:bodyPr>
-          <a:lstStyle/>
-          <a:p>
-            <a:pPr algn="l"/>
-            <a:r>
-              <a:rPr sz="1200" b="0" i="0">
-                <a:solidFill>
-                  <a:srgbClr val="1A1A2E"/>
-                </a:solidFill>
-              </a:rPr>
-              <a:t>  강남 / 신촌 / 병합(공통 피처)</a:t>
-            </a:r>
-          </a:p>
-        </p:txBody>
-      </p:sp>
-      <p:sp>
-        <p:nvSpPr>
-          <p:cNvPr id="21" name="TextBox 20"/>
-          <p:cNvSpPr txBox="1"/>
-          <p:nvPr/>
-        </p:nvSpPr>
-        <p:spPr>
-          <a:xfrm>
-            <a:off x="365760" y="5193792"/>
-            <a:ext cx="4297680" cy="301752"/>
-          </a:xfrm>
-          <a:prstGeom prst="rect">
-            <a:avLst/>
-          </a:prstGeom>
-          <a:noFill/>
-        </p:spPr>
-        <p:txBody>
-          <a:bodyPr wrap="square">
-            <a:spAutoFit/>
-          </a:bodyPr>
-          <a:lstStyle/>
-          <a:p>
-            <a:pPr algn="l"/>
-            <a:r>
-              <a:rPr sz="1200" b="0" i="0">
-                <a:solidFill>
-                  <a:srgbClr val="1A1A2E"/>
-                </a:solidFill>
-              </a:rPr>
-              <a:t>• 재현성 히트맵으로 공통 피처 확인</a:t>
-            </a:r>
-          </a:p>
-        </p:txBody>
-      </p:sp>
-      <p:sp>
-        <p:nvSpPr>
-          <p:cNvPr id="22" name="TextBox 21"/>
-          <p:cNvSpPr txBox="1"/>
-          <p:nvPr/>
-        </p:nvSpPr>
-        <p:spPr>
-          <a:xfrm>
-            <a:off x="4983480" y="1051560"/>
-            <a:ext cx="7040880" cy="320040"/>
-          </a:xfrm>
-          <a:prstGeom prst="rect">
-            <a:avLst/>
-          </a:prstGeom>
-          <a:noFill/>
-        </p:spPr>
-        <p:txBody>
-          <a:bodyPr wrap="square">
-            <a:spAutoFit/>
-          </a:bodyPr>
-          <a:lstStyle/>
-          <a:p>
-            <a:pPr algn="l"/>
-            <a:r>
-              <a:rPr sz="1200" b="1" i="0">
-                <a:solidFill>
-                  <a:srgbClr val="1A355E"/>
-                </a:solidFill>
-              </a:rPr>
-              <a:t>교차 병원 비교 (강남 → 신촌 외부 검증)</a:t>
+              <a:t>Actual vs Predicted (5-fold CV)</a:t>
             </a:r>
           </a:p>
         </p:txBody>
       </p:sp>
       <p:pic>
         <p:nvPicPr>
-          <p:cNvPr id="23" name="Picture 22" descr="09_cross_hospital_comparison.png"/>
+          <p:cNvPr id="6" name="Picture 5" descr="01_linear_actual_vs_pred.png"/>
           <p:cNvPicPr>
             <a:picLocks noChangeAspect="1"/>
           </p:cNvPicPr>
@@ -4259,8 +3610,8 @@
         </p:blipFill>
         <p:spPr>
           <a:xfrm>
-            <a:off x="4983480" y="1417320"/>
-            <a:ext cx="7040880" cy="2743200"/>
+            <a:off x="182880" y="1371600"/>
+            <a:ext cx="5943600" cy="5212080"/>
           </a:xfrm>
           <a:prstGeom prst="rect">
             <a:avLst/>
@@ -4269,14 +3620,14 @@
       </p:pic>
       <p:sp>
         <p:nvSpPr>
-          <p:cNvPr id="24" name="TextBox 23"/>
+          <p:cNvPr id="7" name="TextBox 6"/>
           <p:cNvSpPr txBox="1"/>
           <p:nvPr/>
         </p:nvSpPr>
         <p:spPr>
           <a:xfrm>
-            <a:off x="4983480" y="4251960"/>
-            <a:ext cx="7040880" cy="320040"/>
+            <a:off x="6400800" y="1005840"/>
+            <a:ext cx="5577840" cy="320040"/>
           </a:xfrm>
           <a:prstGeom prst="rect">
             <a:avLst/>
@@ -4296,14 +3647,14 @@
                   <a:srgbClr val="1A355E"/>
                 </a:solidFill>
               </a:rPr>
-              <a:t>외부 검증 상세 결과</a:t>
+              <a:t>회귀 계수 (Standardized Coefficients)</a:t>
             </a:r>
           </a:p>
         </p:txBody>
       </p:sp>
       <p:pic>
         <p:nvPicPr>
-          <p:cNvPr id="25" name="Picture 24" descr="10_external_validation.png"/>
+          <p:cNvPr id="8" name="Picture 7" descr="03_linear_coefficients.png"/>
           <p:cNvPicPr>
             <a:picLocks noChangeAspect="1"/>
           </p:cNvPicPr>
@@ -4317,8 +3668,8 @@
         </p:blipFill>
         <p:spPr>
           <a:xfrm>
-            <a:off x="4983480" y="4617720"/>
-            <a:ext cx="7040880" cy="2103120"/>
+            <a:off x="6400800" y="1371600"/>
+            <a:ext cx="5577840" cy="5212080"/>
           </a:xfrm>
           <a:prstGeom prst="rect">
             <a:avLst/>
@@ -4423,7 +3774,7 @@
                   <a:srgbClr val="FFFFFF"/>
                 </a:solidFill>
               </a:rPr>
-              <a:t>선형 회귀 결과 (강남 – 전체)</a:t>
+              <a:t>로지스틱 회귀 결과 (강남 – 전체)</a:t>
             </a:r>
           </a:p>
         </p:txBody>
@@ -4457,7 +3808,7 @@
                   <a:srgbClr val="BDD7EE"/>
                 </a:solidFill>
               </a:rPr>
-              <a:t>Actual vs Predicted  |  계수 (Coeff)</a:t>
+              <a:t>ROC  |  Confusion Matrix  |  계수</a:t>
             </a:r>
           </a:p>
         </p:txBody>
@@ -4471,7 +3822,7 @@
         <p:spPr>
           <a:xfrm>
             <a:off x="182880" y="1005840"/>
-            <a:ext cx="5943600" cy="320040"/>
+            <a:ext cx="3840480" cy="320040"/>
           </a:xfrm>
           <a:prstGeom prst="rect">
             <a:avLst/>
@@ -4491,14 +3842,14 @@
                   <a:srgbClr val="1A355E"/>
                 </a:solidFill>
               </a:rPr>
-              <a:t>Actual vs Predicted (5-fold CV)</a:t>
+              <a:t>ROC Curves (Case 1~5)</a:t>
             </a:r>
           </a:p>
         </p:txBody>
       </p:sp>
       <p:pic>
         <p:nvPicPr>
-          <p:cNvPr id="6" name="Picture 5" descr="01_linear_actual_vs_pred.png"/>
+          <p:cNvPr id="6" name="Picture 5" descr="04_logistic_roc.png"/>
           <p:cNvPicPr>
             <a:picLocks noChangeAspect="1"/>
           </p:cNvPicPr>
@@ -4513,7 +3864,7 @@
         <p:spPr>
           <a:xfrm>
             <a:off x="182880" y="1371600"/>
-            <a:ext cx="5943600" cy="5212080"/>
+            <a:ext cx="3840480" cy="2743200"/>
           </a:xfrm>
           <a:prstGeom prst="rect">
             <a:avLst/>
@@ -4528,8 +3879,8 @@
         </p:nvSpPr>
         <p:spPr>
           <a:xfrm>
-            <a:off x="6400800" y="1005840"/>
-            <a:ext cx="5577840" cy="320040"/>
+            <a:off x="4297680" y="1005840"/>
+            <a:ext cx="3840480" cy="320040"/>
           </a:xfrm>
           <a:prstGeom prst="rect">
             <a:avLst/>
@@ -4549,14 +3900,14 @@
                   <a:srgbClr val="1A355E"/>
                 </a:solidFill>
               </a:rPr>
-              <a:t>회귀 계수 (Standardized Coefficients)</a:t>
+              <a:t>Confusion Matrix (Best Case)</a:t>
             </a:r>
           </a:p>
         </p:txBody>
       </p:sp>
       <p:pic>
         <p:nvPicPr>
-          <p:cNvPr id="8" name="Picture 7" descr="03_linear_coefficients.png"/>
+          <p:cNvPr id="8" name="Picture 7" descr="06_logistic_confusion.png"/>
           <p:cNvPicPr>
             <a:picLocks noChangeAspect="1"/>
           </p:cNvPicPr>
@@ -4570,8 +3921,182 @@
         </p:blipFill>
         <p:spPr>
           <a:xfrm>
-            <a:off x="6400800" y="1371600"/>
-            <a:ext cx="5577840" cy="5212080"/>
+            <a:off x="4297680" y="1371600"/>
+            <a:ext cx="3840480" cy="2743200"/>
+          </a:xfrm>
+          <a:prstGeom prst="rect">
+            <a:avLst/>
+          </a:prstGeom>
+        </p:spPr>
+      </p:pic>
+      <p:sp>
+        <p:nvSpPr>
+          <p:cNvPr id="9" name="TextBox 8"/>
+          <p:cNvSpPr txBox="1"/>
+          <p:nvPr/>
+        </p:nvSpPr>
+        <p:spPr>
+          <a:xfrm>
+            <a:off x="8321040" y="1005840"/>
+            <a:ext cx="3657600" cy="320040"/>
+          </a:xfrm>
+          <a:prstGeom prst="rect">
+            <a:avLst/>
+          </a:prstGeom>
+          <a:noFill/>
+        </p:spPr>
+        <p:txBody>
+          <a:bodyPr wrap="square">
+            <a:spAutoFit/>
+          </a:bodyPr>
+          <a:lstStyle/>
+          <a:p>
+            <a:pPr algn="l"/>
+            <a:r>
+              <a:rPr sz="1200" b="1" i="0">
+                <a:solidFill>
+                  <a:srgbClr val="1A355E"/>
+                </a:solidFill>
+              </a:rPr>
+              <a:t>로지스틱 계수 (OR ± 95% CI)</a:t>
+            </a:r>
+          </a:p>
+        </p:txBody>
+      </p:sp>
+      <p:pic>
+        <p:nvPicPr>
+          <p:cNvPr id="10" name="Picture 9" descr="07_logistic_coefficients.png"/>
+          <p:cNvPicPr>
+            <a:picLocks noChangeAspect="1"/>
+          </p:cNvPicPr>
+          <p:nvPr/>
+        </p:nvPicPr>
+        <p:blipFill>
+          <a:blip r:embed="rId4"/>
+          <a:stretch>
+            <a:fillRect/>
+          </a:stretch>
+        </p:blipFill>
+        <p:spPr>
+          <a:xfrm>
+            <a:off x="8321040" y="1371600"/>
+            <a:ext cx="3657600" cy="2743200"/>
+          </a:xfrm>
+          <a:prstGeom prst="rect">
+            <a:avLst/>
+          </a:prstGeom>
+        </p:spPr>
+      </p:pic>
+      <p:sp>
+        <p:nvSpPr>
+          <p:cNvPr id="11" name="TextBox 10"/>
+          <p:cNvSpPr txBox="1"/>
+          <p:nvPr/>
+        </p:nvSpPr>
+        <p:spPr>
+          <a:xfrm>
+            <a:off x="182880" y="4206240"/>
+            <a:ext cx="5943600" cy="320040"/>
+          </a:xfrm>
+          <a:prstGeom prst="rect">
+            <a:avLst/>
+          </a:prstGeom>
+          <a:noFill/>
+        </p:spPr>
+        <p:txBody>
+          <a:bodyPr wrap="square">
+            <a:spAutoFit/>
+          </a:bodyPr>
+          <a:lstStyle/>
+          <a:p>
+            <a:pPr algn="l"/>
+            <a:r>
+              <a:rPr sz="1200" b="1" i="0">
+                <a:solidFill>
+                  <a:srgbClr val="1A355E"/>
+                </a:solidFill>
+              </a:rPr>
+              <a:t>피처 선택 — CV R² 후보 세트 비교 (강남)</a:t>
+            </a:r>
+          </a:p>
+        </p:txBody>
+      </p:sp>
+      <p:pic>
+        <p:nvPicPr>
+          <p:cNvPr id="12" name="Picture 11" descr="04_cv_r2_comparison.png"/>
+          <p:cNvPicPr>
+            <a:picLocks noChangeAspect="1"/>
+          </p:cNvPicPr>
+          <p:nvPr/>
+        </p:nvPicPr>
+        <p:blipFill>
+          <a:blip r:embed="rId5"/>
+          <a:stretch>
+            <a:fillRect/>
+          </a:stretch>
+        </p:blipFill>
+        <p:spPr>
+          <a:xfrm>
+            <a:off x="182880" y="4572000"/>
+            <a:ext cx="5943600" cy="2103120"/>
+          </a:xfrm>
+          <a:prstGeom prst="rect">
+            <a:avLst/>
+          </a:prstGeom>
+        </p:spPr>
+      </p:pic>
+      <p:sp>
+        <p:nvSpPr>
+          <p:cNvPr id="13" name="TextBox 12"/>
+          <p:cNvSpPr txBox="1"/>
+          <p:nvPr/>
+        </p:nvSpPr>
+        <p:spPr>
+          <a:xfrm>
+            <a:off x="6400800" y="4206240"/>
+            <a:ext cx="5577840" cy="320040"/>
+          </a:xfrm>
+          <a:prstGeom prst="rect">
+            <a:avLst/>
+          </a:prstGeom>
+          <a:noFill/>
+        </p:spPr>
+        <p:txBody>
+          <a:bodyPr wrap="square">
+            <a:spAutoFit/>
+          </a:bodyPr>
+          <a:lstStyle/>
+          <a:p>
+            <a:pPr algn="l"/>
+            <a:r>
+              <a:rPr sz="1200" b="1" i="0">
+                <a:solidFill>
+                  <a:srgbClr val="1A355E"/>
+                </a:solidFill>
+              </a:rPr>
+              <a:t>앙상블 투표 + Spearman 상관 (강남 최종 피처)</a:t>
+            </a:r>
+          </a:p>
+        </p:txBody>
+      </p:sp>
+      <p:pic>
+        <p:nvPicPr>
+          <p:cNvPr id="14" name="Picture 13" descr="05_final_features_summary.png"/>
+          <p:cNvPicPr>
+            <a:picLocks noChangeAspect="1"/>
+          </p:cNvPicPr>
+          <p:nvPr/>
+        </p:nvPicPr>
+        <p:blipFill>
+          <a:blip r:embed="rId6"/>
+          <a:stretch>
+            <a:fillRect/>
+          </a:stretch>
+        </p:blipFill>
+        <p:spPr>
+          <a:xfrm>
+            <a:off x="6400800" y="4572000"/>
+            <a:ext cx="5577840" cy="2103120"/>
           </a:xfrm>
           <a:prstGeom prst="rect">
             <a:avLst/>
@@ -4676,433 +4201,6 @@
                   <a:srgbClr val="FFFFFF"/>
                 </a:solidFill>
               </a:rPr>
-              <a:t>로지스틱 회귀 결과 (강남 – 전체)</a:t>
-            </a:r>
-          </a:p>
-        </p:txBody>
-      </p:sp>
-      <p:sp>
-        <p:nvSpPr>
-          <p:cNvPr id="4" name="TextBox 3"/>
-          <p:cNvSpPr txBox="1"/>
-          <p:nvPr/>
-        </p:nvSpPr>
-        <p:spPr>
-          <a:xfrm>
-            <a:off x="320040" y="749808"/>
-            <a:ext cx="11430000" cy="320040"/>
-          </a:xfrm>
-          <a:prstGeom prst="rect">
-            <a:avLst/>
-          </a:prstGeom>
-          <a:noFill/>
-        </p:spPr>
-        <p:txBody>
-          <a:bodyPr wrap="square">
-            <a:spAutoFit/>
-          </a:bodyPr>
-          <a:lstStyle/>
-          <a:p>
-            <a:pPr algn="l"/>
-            <a:r>
-              <a:rPr sz="1300" b="0" i="0">
-                <a:solidFill>
-                  <a:srgbClr val="BDD7EE"/>
-                </a:solidFill>
-              </a:rPr>
-              <a:t>ROC  |  Confusion Matrix  |  계수</a:t>
-            </a:r>
-          </a:p>
-        </p:txBody>
-      </p:sp>
-      <p:sp>
-        <p:nvSpPr>
-          <p:cNvPr id="5" name="TextBox 4"/>
-          <p:cNvSpPr txBox="1"/>
-          <p:nvPr/>
-        </p:nvSpPr>
-        <p:spPr>
-          <a:xfrm>
-            <a:off x="182880" y="1005840"/>
-            <a:ext cx="3840480" cy="320040"/>
-          </a:xfrm>
-          <a:prstGeom prst="rect">
-            <a:avLst/>
-          </a:prstGeom>
-          <a:noFill/>
-        </p:spPr>
-        <p:txBody>
-          <a:bodyPr wrap="square">
-            <a:spAutoFit/>
-          </a:bodyPr>
-          <a:lstStyle/>
-          <a:p>
-            <a:pPr algn="l"/>
-            <a:r>
-              <a:rPr sz="1200" b="1" i="0">
-                <a:solidFill>
-                  <a:srgbClr val="1A355E"/>
-                </a:solidFill>
-              </a:rPr>
-              <a:t>ROC Curves (Case 1~5)</a:t>
-            </a:r>
-          </a:p>
-        </p:txBody>
-      </p:sp>
-      <p:pic>
-        <p:nvPicPr>
-          <p:cNvPr id="6" name="Picture 5" descr="04_logistic_roc.png"/>
-          <p:cNvPicPr>
-            <a:picLocks noChangeAspect="1"/>
-          </p:cNvPicPr>
-          <p:nvPr/>
-        </p:nvPicPr>
-        <p:blipFill>
-          <a:blip r:embed="rId2"/>
-          <a:stretch>
-            <a:fillRect/>
-          </a:stretch>
-        </p:blipFill>
-        <p:spPr>
-          <a:xfrm>
-            <a:off x="182880" y="1371600"/>
-            <a:ext cx="3840480" cy="2743200"/>
-          </a:xfrm>
-          <a:prstGeom prst="rect">
-            <a:avLst/>
-          </a:prstGeom>
-        </p:spPr>
-      </p:pic>
-      <p:sp>
-        <p:nvSpPr>
-          <p:cNvPr id="7" name="TextBox 6"/>
-          <p:cNvSpPr txBox="1"/>
-          <p:nvPr/>
-        </p:nvSpPr>
-        <p:spPr>
-          <a:xfrm>
-            <a:off x="4297680" y="1005840"/>
-            <a:ext cx="3840480" cy="320040"/>
-          </a:xfrm>
-          <a:prstGeom prst="rect">
-            <a:avLst/>
-          </a:prstGeom>
-          <a:noFill/>
-        </p:spPr>
-        <p:txBody>
-          <a:bodyPr wrap="square">
-            <a:spAutoFit/>
-          </a:bodyPr>
-          <a:lstStyle/>
-          <a:p>
-            <a:pPr algn="l"/>
-            <a:r>
-              <a:rPr sz="1200" b="1" i="0">
-                <a:solidFill>
-                  <a:srgbClr val="1A355E"/>
-                </a:solidFill>
-              </a:rPr>
-              <a:t>Confusion Matrix (Best Case)</a:t>
-            </a:r>
-          </a:p>
-        </p:txBody>
-      </p:sp>
-      <p:pic>
-        <p:nvPicPr>
-          <p:cNvPr id="8" name="Picture 7" descr="06_logistic_confusion.png"/>
-          <p:cNvPicPr>
-            <a:picLocks noChangeAspect="1"/>
-          </p:cNvPicPr>
-          <p:nvPr/>
-        </p:nvPicPr>
-        <p:blipFill>
-          <a:blip r:embed="rId3"/>
-          <a:stretch>
-            <a:fillRect/>
-          </a:stretch>
-        </p:blipFill>
-        <p:spPr>
-          <a:xfrm>
-            <a:off x="4297680" y="1371600"/>
-            <a:ext cx="3840480" cy="2743200"/>
-          </a:xfrm>
-          <a:prstGeom prst="rect">
-            <a:avLst/>
-          </a:prstGeom>
-        </p:spPr>
-      </p:pic>
-      <p:sp>
-        <p:nvSpPr>
-          <p:cNvPr id="9" name="TextBox 8"/>
-          <p:cNvSpPr txBox="1"/>
-          <p:nvPr/>
-        </p:nvSpPr>
-        <p:spPr>
-          <a:xfrm>
-            <a:off x="8321040" y="1005840"/>
-            <a:ext cx="3657600" cy="320040"/>
-          </a:xfrm>
-          <a:prstGeom prst="rect">
-            <a:avLst/>
-          </a:prstGeom>
-          <a:noFill/>
-        </p:spPr>
-        <p:txBody>
-          <a:bodyPr wrap="square">
-            <a:spAutoFit/>
-          </a:bodyPr>
-          <a:lstStyle/>
-          <a:p>
-            <a:pPr algn="l"/>
-            <a:r>
-              <a:rPr sz="1200" b="1" i="0">
-                <a:solidFill>
-                  <a:srgbClr val="1A355E"/>
-                </a:solidFill>
-              </a:rPr>
-              <a:t>로지스틱 계수 (OR ± 95% CI)</a:t>
-            </a:r>
-          </a:p>
-        </p:txBody>
-      </p:sp>
-      <p:pic>
-        <p:nvPicPr>
-          <p:cNvPr id="10" name="Picture 9" descr="07_logistic_coefficients.png"/>
-          <p:cNvPicPr>
-            <a:picLocks noChangeAspect="1"/>
-          </p:cNvPicPr>
-          <p:nvPr/>
-        </p:nvPicPr>
-        <p:blipFill>
-          <a:blip r:embed="rId4"/>
-          <a:stretch>
-            <a:fillRect/>
-          </a:stretch>
-        </p:blipFill>
-        <p:spPr>
-          <a:xfrm>
-            <a:off x="8321040" y="1371600"/>
-            <a:ext cx="3657600" cy="2743200"/>
-          </a:xfrm>
-          <a:prstGeom prst="rect">
-            <a:avLst/>
-          </a:prstGeom>
-        </p:spPr>
-      </p:pic>
-      <p:sp>
-        <p:nvSpPr>
-          <p:cNvPr id="11" name="TextBox 10"/>
-          <p:cNvSpPr txBox="1"/>
-          <p:nvPr/>
-        </p:nvSpPr>
-        <p:spPr>
-          <a:xfrm>
-            <a:off x="182880" y="4206240"/>
-            <a:ext cx="5943600" cy="320040"/>
-          </a:xfrm>
-          <a:prstGeom prst="rect">
-            <a:avLst/>
-          </a:prstGeom>
-          <a:noFill/>
-        </p:spPr>
-        <p:txBody>
-          <a:bodyPr wrap="square">
-            <a:spAutoFit/>
-          </a:bodyPr>
-          <a:lstStyle/>
-          <a:p>
-            <a:pPr algn="l"/>
-            <a:r>
-              <a:rPr sz="1200" b="1" i="0">
-                <a:solidFill>
-                  <a:srgbClr val="1A355E"/>
-                </a:solidFill>
-              </a:rPr>
-              <a:t>피처 선택 — CV R² 후보 세트 비교 (강남)</a:t>
-            </a:r>
-          </a:p>
-        </p:txBody>
-      </p:sp>
-      <p:pic>
-        <p:nvPicPr>
-          <p:cNvPr id="12" name="Picture 11" descr="04_cv_r2_comparison.png"/>
-          <p:cNvPicPr>
-            <a:picLocks noChangeAspect="1"/>
-          </p:cNvPicPr>
-          <p:nvPr/>
-        </p:nvPicPr>
-        <p:blipFill>
-          <a:blip r:embed="rId5"/>
-          <a:stretch>
-            <a:fillRect/>
-          </a:stretch>
-        </p:blipFill>
-        <p:spPr>
-          <a:xfrm>
-            <a:off x="182880" y="4572000"/>
-            <a:ext cx="5943600" cy="2103120"/>
-          </a:xfrm>
-          <a:prstGeom prst="rect">
-            <a:avLst/>
-          </a:prstGeom>
-        </p:spPr>
-      </p:pic>
-      <p:sp>
-        <p:nvSpPr>
-          <p:cNvPr id="13" name="TextBox 12"/>
-          <p:cNvSpPr txBox="1"/>
-          <p:nvPr/>
-        </p:nvSpPr>
-        <p:spPr>
-          <a:xfrm>
-            <a:off x="6400800" y="4206240"/>
-            <a:ext cx="5577840" cy="320040"/>
-          </a:xfrm>
-          <a:prstGeom prst="rect">
-            <a:avLst/>
-          </a:prstGeom>
-          <a:noFill/>
-        </p:spPr>
-        <p:txBody>
-          <a:bodyPr wrap="square">
-            <a:spAutoFit/>
-          </a:bodyPr>
-          <a:lstStyle/>
-          <a:p>
-            <a:pPr algn="l"/>
-            <a:r>
-              <a:rPr sz="1200" b="1" i="0">
-                <a:solidFill>
-                  <a:srgbClr val="1A355E"/>
-                </a:solidFill>
-              </a:rPr>
-              <a:t>앙상블 투표 + Spearman 상관 (강남 최종 피처)</a:t>
-            </a:r>
-          </a:p>
-        </p:txBody>
-      </p:sp>
-      <p:pic>
-        <p:nvPicPr>
-          <p:cNvPr id="14" name="Picture 13" descr="05_final_features_summary.png"/>
-          <p:cNvPicPr>
-            <a:picLocks noChangeAspect="1"/>
-          </p:cNvPicPr>
-          <p:nvPr/>
-        </p:nvPicPr>
-        <p:blipFill>
-          <a:blip r:embed="rId6"/>
-          <a:stretch>
-            <a:fillRect/>
-          </a:stretch>
-        </p:blipFill>
-        <p:spPr>
-          <a:xfrm>
-            <a:off x="6400800" y="4572000"/>
-            <a:ext cx="5577840" cy="2103120"/>
-          </a:xfrm>
-          <a:prstGeom prst="rect">
-            <a:avLst/>
-          </a:prstGeom>
-        </p:spPr>
-      </p:pic>
-    </p:spTree>
-  </p:cSld>
-  <p:clrMapOvr>
-    <a:masterClrMapping/>
-  </p:clrMapOvr>
-</p:sld>
-</file>
-
-<file path=ppt/slides/slide13.xml><?xml version="1.0" encoding="utf-8"?>
-<p:sld xmlns:a="http://schemas.openxmlformats.org/drawingml/2006/main" xmlns:p="http://schemas.openxmlformats.org/presentationml/2006/main" xmlns:r="http://schemas.openxmlformats.org/officeDocument/2006/relationships">
-  <p:cSld>
-    <p:bg>
-      <p:bgPr>
-        <a:solidFill>
-          <a:srgbClr val="FFFFFF"/>
-        </a:solidFill>
-        <a:effectLst/>
-      </p:bgPr>
-    </p:bg>
-    <p:spTree>
-      <p:nvGrpSpPr>
-        <p:cNvPr id="1" name=""/>
-        <p:cNvGrpSpPr/>
-        <p:nvPr/>
-      </p:nvGrpSpPr>
-      <p:grpSpPr/>
-      <p:sp>
-        <p:nvSpPr>
-          <p:cNvPr id="2" name="Rectangle 1"/>
-          <p:cNvSpPr/>
-          <p:nvPr/>
-        </p:nvSpPr>
-        <p:spPr>
-          <a:xfrm>
-            <a:off x="0" y="0"/>
-            <a:ext cx="12188952" cy="960120"/>
-          </a:xfrm>
-          <a:prstGeom prst="rect">
-            <a:avLst/>
-          </a:prstGeom>
-          <a:solidFill>
-            <a:srgbClr val="1A355E"/>
-          </a:solidFill>
-          <a:ln>
-            <a:noFill/>
-          </a:ln>
-        </p:spPr>
-        <p:style>
-          <a:lnRef idx="1">
-            <a:schemeClr val="accent1"/>
-          </a:lnRef>
-          <a:fillRef idx="3">
-            <a:schemeClr val="accent1"/>
-          </a:fillRef>
-          <a:effectRef idx="2">
-            <a:schemeClr val="accent1"/>
-          </a:effectRef>
-          <a:fontRef idx="minor">
-            <a:schemeClr val="lt1"/>
-          </a:fontRef>
-        </p:style>
-        <p:txBody>
-          <a:bodyPr rtlCol="0" anchor="ctr"/>
-          <a:lstStyle/>
-          <a:p>
-            <a:pPr algn="ctr"/>
-          </a:p>
-        </p:txBody>
-      </p:sp>
-      <p:sp>
-        <p:nvSpPr>
-          <p:cNvPr id="3" name="TextBox 2"/>
-          <p:cNvSpPr txBox="1"/>
-          <p:nvPr/>
-        </p:nvSpPr>
-        <p:spPr>
-          <a:xfrm>
-            <a:off x="274320" y="91440"/>
-            <a:ext cx="11430000" cy="685800"/>
-          </a:xfrm>
-          <a:prstGeom prst="rect">
-            <a:avLst/>
-          </a:prstGeom>
-          <a:noFill/>
-        </p:spPr>
-        <p:txBody>
-          <a:bodyPr wrap="square">
-            <a:spAutoFit/>
-          </a:bodyPr>
-          <a:lstStyle/>
-          <a:p>
-            <a:pPr algn="l"/>
-            <a:r>
-              <a:rPr sz="2800" b="1" i="0">
-                <a:solidFill>
-                  <a:srgbClr val="FFFFFF"/>
-                </a:solidFill>
-              </a:rPr>
               <a:t>핵심 수치 요약 (강남 전체, 5-Fold CV)</a:t>
             </a:r>
           </a:p>
@@ -6873,7 +5971,7 @@
                   <a:srgbClr val="1A1A2E"/>
                 </a:solidFill>
               </a:rPr>
-              <a:t>• 전체 보고서(회귀+피처+교차병원+성별층화)는 research_report_0430.md에서 확인</a:t>
+              <a:t>• 전체 보고서(회귀+피처+교차병원+BMI기여도)는 research_report_0430.md에서 확인</a:t>
             </a:r>
           </a:p>
         </p:txBody>
@@ -6886,7 +5984,7 @@
 </p:sld>
 </file>
 
-<file path=ppt/slides/slide14.xml><?xml version="1.0" encoding="utf-8"?>
+<file path=ppt/slides/slide13.xml><?xml version="1.0" encoding="utf-8"?>
 <p:sld xmlns:a="http://schemas.openxmlformats.org/drawingml/2006/main" xmlns:p="http://schemas.openxmlformats.org/presentationml/2006/main" xmlns:r="http://schemas.openxmlformats.org/officeDocument/2006/relationships">
   <p:cSld>
     <p:bg>
@@ -6989,8 +6087,8 @@
         </p:nvSpPr>
         <p:spPr>
           <a:xfrm>
-            <a:off x="365760" y="1188720"/>
-            <a:ext cx="3657600" cy="2286000"/>
+            <a:off x="1371600" y="1371600"/>
+            <a:ext cx="4389120" cy="2286000"/>
           </a:xfrm>
           <a:prstGeom prst="rect">
             <a:avLst/>
@@ -7032,8 +6130,8 @@
         </p:nvSpPr>
         <p:spPr>
           <a:xfrm>
-            <a:off x="365760" y="1188720"/>
-            <a:ext cx="3657600" cy="457200"/>
+            <a:off x="1371600" y="1371600"/>
+            <a:ext cx="4389120" cy="457200"/>
           </a:xfrm>
           <a:prstGeom prst="rect">
             <a:avLst/>
@@ -7075,8 +6173,8 @@
         </p:nvSpPr>
         <p:spPr>
           <a:xfrm>
-            <a:off x="457200" y="1234440"/>
-            <a:ext cx="3474720" cy="365760"/>
+            <a:off x="1463040" y="1417320"/>
+            <a:ext cx="4206240" cy="365760"/>
           </a:xfrm>
           <a:prstGeom prst="rect">
             <a:avLst/>
@@ -7109,8 +6207,8 @@
         </p:nvSpPr>
         <p:spPr>
           <a:xfrm>
-            <a:off x="457200" y="1737360"/>
-            <a:ext cx="3474720" cy="1645920"/>
+            <a:off x="1463040" y="1920240"/>
+            <a:ext cx="4206240" cy="1645920"/>
           </a:xfrm>
           <a:prstGeom prst="rect">
             <a:avLst/>
@@ -7144,8 +6242,8 @@
         </p:nvSpPr>
         <p:spPr>
           <a:xfrm>
-            <a:off x="4297680" y="1188720"/>
-            <a:ext cx="3657600" cy="2286000"/>
+            <a:off x="6126480" y="1371600"/>
+            <a:ext cx="4389120" cy="2286000"/>
           </a:xfrm>
           <a:prstGeom prst="rect">
             <a:avLst/>
@@ -7187,8 +6285,8 @@
         </p:nvSpPr>
         <p:spPr>
           <a:xfrm>
-            <a:off x="4297680" y="1188720"/>
-            <a:ext cx="3657600" cy="457200"/>
+            <a:off x="6126480" y="1371600"/>
+            <a:ext cx="4389120" cy="457200"/>
           </a:xfrm>
           <a:prstGeom prst="rect">
             <a:avLst/>
@@ -7230,8 +6328,8 @@
         </p:nvSpPr>
         <p:spPr>
           <a:xfrm>
-            <a:off x="4389120" y="1234440"/>
-            <a:ext cx="3474720" cy="365760"/>
+            <a:off x="6217920" y="1417320"/>
+            <a:ext cx="4206240" cy="365760"/>
           </a:xfrm>
           <a:prstGeom prst="rect">
             <a:avLst/>
@@ -7264,8 +6362,8 @@
         </p:nvSpPr>
         <p:spPr>
           <a:xfrm>
-            <a:off x="4389120" y="1737360"/>
-            <a:ext cx="3474720" cy="1645920"/>
+            <a:off x="6217920" y="1920240"/>
+            <a:ext cx="4206240" cy="1645920"/>
           </a:xfrm>
           <a:prstGeom prst="rect">
             <a:avLst/>
@@ -7299,8 +6397,8 @@
         </p:nvSpPr>
         <p:spPr>
           <a:xfrm>
-            <a:off x="8229600" y="1188720"/>
-            <a:ext cx="3657600" cy="2286000"/>
+            <a:off x="1371600" y="3931920"/>
+            <a:ext cx="4389120" cy="2286000"/>
           </a:xfrm>
           <a:prstGeom prst="rect">
             <a:avLst/>
@@ -7342,8 +6440,8 @@
         </p:nvSpPr>
         <p:spPr>
           <a:xfrm>
-            <a:off x="8229600" y="1188720"/>
-            <a:ext cx="3657600" cy="457200"/>
+            <a:off x="1371600" y="3931920"/>
+            <a:ext cx="4389120" cy="457200"/>
           </a:xfrm>
           <a:prstGeom prst="rect">
             <a:avLst/>
@@ -7385,8 +6483,8 @@
         </p:nvSpPr>
         <p:spPr>
           <a:xfrm>
-            <a:off x="8321040" y="1234440"/>
-            <a:ext cx="3474720" cy="365760"/>
+            <a:off x="1463040" y="3977639"/>
+            <a:ext cx="4206240" cy="365760"/>
           </a:xfrm>
           <a:prstGeom prst="rect">
             <a:avLst/>
@@ -7419,8 +6517,8 @@
         </p:nvSpPr>
         <p:spPr>
           <a:xfrm>
-            <a:off x="8321040" y="1737360"/>
-            <a:ext cx="3474720" cy="1645920"/>
+            <a:off x="1463040" y="4480559"/>
+            <a:ext cx="4206240" cy="1645920"/>
           </a:xfrm>
           <a:prstGeom prst="rect">
             <a:avLst/>
@@ -7454,8 +6552,8 @@
         </p:nvSpPr>
         <p:spPr>
           <a:xfrm>
-            <a:off x="365760" y="3749039"/>
-            <a:ext cx="3657600" cy="2286000"/>
+            <a:off x="6126480" y="3931920"/>
+            <a:ext cx="4389120" cy="2286000"/>
           </a:xfrm>
           <a:prstGeom prst="rect">
             <a:avLst/>
@@ -7497,14 +6595,14 @@
         </p:nvSpPr>
         <p:spPr>
           <a:xfrm>
-            <a:off x="365760" y="3749039"/>
-            <a:ext cx="3657600" cy="457200"/>
+            <a:off x="6126480" y="3931920"/>
+            <a:ext cx="4389120" cy="457200"/>
           </a:xfrm>
           <a:prstGeom prst="rect">
             <a:avLst/>
           </a:prstGeom>
           <a:solidFill>
-            <a:srgbClr val="AA44CC"/>
+            <a:srgbClr val="00B0D0"/>
           </a:solidFill>
           <a:ln>
             <a:noFill/>
@@ -7540,8 +6638,8 @@
         </p:nvSpPr>
         <p:spPr>
           <a:xfrm>
-            <a:off x="457200" y="3794759"/>
-            <a:ext cx="3474720" cy="365760"/>
+            <a:off x="6217920" y="3977639"/>
+            <a:ext cx="4206240" cy="365760"/>
           </a:xfrm>
           <a:prstGeom prst="rect">
             <a:avLst/>
@@ -7561,7 +6659,7 @@
                   <a:srgbClr val="FFFFFF"/>
                 </a:solidFill>
               </a:rPr>
-              <a:t>④ 성별 이질성 탐색</a:t>
+              <a:t>④ 재현성 &amp; 외부 검증</a:t>
             </a:r>
           </a:p>
         </p:txBody>
@@ -7574,8 +6672,8 @@
         </p:nvSpPr>
         <p:spPr>
           <a:xfrm>
-            <a:off x="457200" y="4297679"/>
-            <a:ext cx="3474720" cy="1645920"/>
+            <a:off x="6217920" y="4480559"/>
+            <a:ext cx="4206240" cy="1645920"/>
           </a:xfrm>
           <a:prstGeom prst="rect">
             <a:avLst/>
@@ -7595,108 +6693,22 @@
                   <a:srgbClr val="FFFFFF"/>
                 </a:solidFill>
               </a:rPr>
-              <a:t>층화 분석으로 근감소 위험 패턴의
-성별 차이를 독립 모델로 정량화</a:t>
-            </a:r>
-          </a:p>
-        </p:txBody>
-      </p:sp>
-      <p:sp>
-        <p:nvSpPr>
-          <p:cNvPr id="20" name="Rectangle 19"/>
-          <p:cNvSpPr/>
-          <p:nvPr/>
-        </p:nvSpPr>
-        <p:spPr>
-          <a:xfrm>
-            <a:off x="4297680" y="3749039"/>
-            <a:ext cx="3657600" cy="2286000"/>
-          </a:xfrm>
-          <a:prstGeom prst="rect">
-            <a:avLst/>
-          </a:prstGeom>
-          <a:solidFill>
-            <a:srgbClr val="224470"/>
-          </a:solidFill>
-          <a:ln>
-            <a:noFill/>
-          </a:ln>
-        </p:spPr>
-        <p:style>
-          <a:lnRef idx="1">
-            <a:schemeClr val="accent1"/>
-          </a:lnRef>
-          <a:fillRef idx="3">
-            <a:schemeClr val="accent1"/>
-          </a:fillRef>
-          <a:effectRef idx="2">
-            <a:schemeClr val="accent1"/>
-          </a:effectRef>
-          <a:fontRef idx="minor">
-            <a:schemeClr val="lt1"/>
-          </a:fontRef>
-        </p:style>
-        <p:txBody>
-          <a:bodyPr rtlCol="0" anchor="ctr"/>
-          <a:lstStyle/>
-          <a:p>
-            <a:pPr algn="ctr"/>
-          </a:p>
-        </p:txBody>
-      </p:sp>
-      <p:sp>
-        <p:nvSpPr>
-          <p:cNvPr id="21" name="Rectangle 20"/>
-          <p:cNvSpPr/>
-          <p:nvPr/>
-        </p:nvSpPr>
-        <p:spPr>
-          <a:xfrm>
-            <a:off x="4297680" y="3749039"/>
-            <a:ext cx="3657600" cy="457200"/>
-          </a:xfrm>
-          <a:prstGeom prst="rect">
-            <a:avLst/>
-          </a:prstGeom>
-          <a:solidFill>
-            <a:srgbClr val="00B0D0"/>
-          </a:solidFill>
-          <a:ln>
-            <a:noFill/>
-          </a:ln>
-        </p:spPr>
-        <p:style>
-          <a:lnRef idx="1">
-            <a:schemeClr val="accent1"/>
-          </a:lnRef>
-          <a:fillRef idx="3">
-            <a:schemeClr val="accent1"/>
-          </a:fillRef>
-          <a:effectRef idx="2">
-            <a:schemeClr val="accent1"/>
-          </a:effectRef>
-          <a:fontRef idx="minor">
-            <a:schemeClr val="lt1"/>
-          </a:fontRef>
-        </p:style>
-        <p:txBody>
-          <a:bodyPr rtlCol="0" anchor="ctr"/>
-          <a:lstStyle/>
-          <a:p>
-            <a:pPr algn="ctr"/>
-          </a:p>
-        </p:txBody>
-      </p:sp>
-      <p:sp>
-        <p:nvSpPr>
-          <p:cNvPr id="22" name="TextBox 21"/>
+              <a:t>강남·신촌 교차 검증으로
+피처 선택과 모델의 일반화 가능성 확인</a:t>
+            </a:r>
+          </a:p>
+        </p:txBody>
+      </p:sp>
+      <p:sp>
+        <p:nvSpPr>
+          <p:cNvPr id="20" name="TextBox 19"/>
           <p:cNvSpPr txBox="1"/>
           <p:nvPr/>
         </p:nvSpPr>
         <p:spPr>
           <a:xfrm>
-            <a:off x="4389120" y="3794759"/>
-            <a:ext cx="3474720" cy="365760"/>
+            <a:off x="365760" y="6400800"/>
+            <a:ext cx="11430000" cy="411480"/>
           </a:xfrm>
           <a:prstGeom prst="rect">
             <a:avLst/>
@@ -7711,82 +6723,13 @@
           <a:p>
             <a:pPr algn="ctr"/>
             <a:r>
-              <a:rPr sz="1400" b="1" i="0">
-                <a:solidFill>
-                  <a:srgbClr val="FFFFFF"/>
-                </a:solidFill>
-              </a:rPr>
-              <a:t>⑤ 재현성 &amp; 외부 검증</a:t>
-            </a:r>
-          </a:p>
-        </p:txBody>
-      </p:sp>
-      <p:sp>
-        <p:nvSpPr>
-          <p:cNvPr id="23" name="TextBox 22"/>
-          <p:cNvSpPr txBox="1"/>
-          <p:nvPr/>
-        </p:nvSpPr>
-        <p:spPr>
-          <a:xfrm>
-            <a:off x="4389120" y="4297679"/>
-            <a:ext cx="3474720" cy="1645920"/>
-          </a:xfrm>
-          <a:prstGeom prst="rect">
-            <a:avLst/>
-          </a:prstGeom>
-          <a:noFill/>
-        </p:spPr>
-        <p:txBody>
-          <a:bodyPr wrap="square">
-            <a:spAutoFit/>
-          </a:bodyPr>
-          <a:lstStyle/>
-          <a:p>
-            <a:pPr algn="ctr"/>
-            <a:r>
-              <a:rPr sz="1200" b="0" i="0">
-                <a:solidFill>
-                  <a:srgbClr val="FFFFFF"/>
-                </a:solidFill>
-              </a:rPr>
-              <a:t>강남·신촌 교차 검증으로
-피처 선택과 모델의 일반화 가능성 확인</a:t>
-            </a:r>
-          </a:p>
-        </p:txBody>
-      </p:sp>
-      <p:sp>
-        <p:nvSpPr>
-          <p:cNvPr id="24" name="TextBox 23"/>
-          <p:cNvSpPr txBox="1"/>
-          <p:nvPr/>
-        </p:nvSpPr>
-        <p:spPr>
-          <a:xfrm>
-            <a:off x="365760" y="6400800"/>
-            <a:ext cx="11430000" cy="411480"/>
-          </a:xfrm>
-          <a:prstGeom prst="rect">
-            <a:avLst/>
-          </a:prstGeom>
-          <a:noFill/>
-        </p:spPr>
-        <p:txBody>
-          <a:bodyPr wrap="square">
-            <a:spAutoFit/>
-          </a:bodyPr>
-          <a:lstStyle/>
-          <a:p>
-            <a:pPr algn="ctr"/>
-            <a:r>
               <a:rPr sz="1300" b="1" i="0">
                 <a:solidFill>
                   <a:srgbClr val="FFC000"/>
                 </a:solidFill>
               </a:rPr>
               <a:t>0430 설계는 기존 0424 대비 방법론적 엄밀성을 전반적으로 향상,
-BMI 보정·자동 피처 선택·성별 층화·다병원 검증을 통해 연구 결론의 신뢰성을 높임.</a:t>
+BMI 보정·자동 피처 선택·다병원 검증을 통해 연구 결론의 신뢰성을 높임.</a:t>
             </a:r>
           </a:p>
         </p:txBody>
@@ -7923,7 +6866,7 @@
                   <a:srgbClr val="BDD7EE"/>
                 </a:solidFill>
               </a:rPr>
-              <a:t>0424 → 0430  |  총 5가지 설계 변경</a:t>
+              <a:t>0424 → 0430  |  총 4가지 설계 변경</a:t>
             </a:r>
           </a:p>
         </p:txBody>
@@ -7953,7 +6896,7 @@
                 <a:gridCol w="2377440"/>
                 <a:gridCol w="2377440"/>
               </a:tblGrid>
-              <a:tr h="937260">
+              <a:tr h="1124712">
                 <a:tc>
                   <a:txBody>
                     <a:bodyPr/>
@@ -8065,7 +7008,7 @@
                   </a:tcPr>
                 </a:tc>
               </a:tr>
-              <a:tr h="937260">
+              <a:tr h="1124712">
                 <a:tc>
                   <a:txBody>
                     <a:bodyPr/>
@@ -8221,7 +7164,7 @@
                   </a:tcPr>
                 </a:tc>
               </a:tr>
-              <a:tr h="937260">
+              <a:tr h="1124712">
                 <a:tc>
                   <a:txBody>
                     <a:bodyPr/>
@@ -8344,7 +7287,7 @@
                   </a:tcPr>
                 </a:tc>
               </a:tr>
-              <a:tr h="937260">
+              <a:tr h="1124712">
                 <a:tc>
                   <a:txBody>
                     <a:bodyPr/>
@@ -8489,7 +7432,7 @@
                   </a:tcPr>
                 </a:tc>
               </a:tr>
-              <a:tr h="937260">
+              <a:tr h="1124712">
                 <a:tc>
                   <a:txBody>
                     <a:bodyPr/>
@@ -8524,7 +7467,7 @@
                             <a:srgbClr val="1A1A2E"/>
                           </a:solidFill>
                         </a:rPr>
-                        <a:t>성별 층화</a:t>
+                        <a:t>다병원 분석</a:t>
                       </a:r>
                     </a:p>
                   </a:txBody>
@@ -8546,7 +7489,7 @@
                             <a:srgbClr val="1A1A2E"/>
                           </a:solidFill>
                         </a:rPr>
-                        <a:t>성별 = 공변량(더미)만 사용</a:t>
+                        <a:t>강남 단독</a:t>
                       </a:r>
                     </a:p>
                     <a:p>
@@ -8557,7 +7500,7 @@
                             <a:srgbClr val="1A1A2E"/>
                           </a:solidFill>
                         </a:rPr>
-                        <a:t>층화 분석 없음</a:t>
+                        <a:t>(config.SITE 수동 변경)</a:t>
                       </a:r>
                     </a:p>
                   </a:txBody>
@@ -8579,7 +7522,18 @@
                             <a:srgbClr val="1A1A2E"/>
                           </a:solidFill>
                         </a:rPr>
-                        <a:t>전체 / 여성 / 남성 독립 모델 적합</a:t>
+                        <a:t>강남·신촌 자동 순회 +</a:t>
+                      </a:r>
+                    </a:p>
+                    <a:p>
+                      <a:pPr algn="ctr"/>
+                      <a:r>
+                        <a:rPr sz="1100" b="0">
+                          <a:solidFill>
+                            <a:srgbClr val="1A1A2E"/>
+                          </a:solidFill>
+                        </a:rPr>
+                        <a:t>교차 병원 비교(외부 검증)</a:t>
                       </a:r>
                     </a:p>
                   </a:txBody>
@@ -8601,158 +7555,13 @@
                             <a:srgbClr val="1A1A2E"/>
                           </a:solidFill>
                         </a:rPr>
-                        <a:t>성별 이질성(근감소 위험 패턴)</a:t>
-                      </a:r>
-                    </a:p>
-                    <a:p>
-                      <a:pPr algn="ctr"/>
-                      <a:r>
-                        <a:rPr sz="1100" b="0">
-                          <a:solidFill>
-                            <a:srgbClr val="1A1A2E"/>
-                          </a:solidFill>
-                        </a:rPr>
-                        <a:t>탐색</a:t>
+                        <a:t>재현성(generalizability) 확인</a:t>
                       </a:r>
                     </a:p>
                   </a:txBody>
                   <a:tcPr>
                     <a:solidFill>
                       <a:srgbClr val="FFFFFF"/>
-                    </a:solidFill>
-                  </a:tcPr>
-                </a:tc>
-              </a:tr>
-              <a:tr h="937260">
-                <a:tc>
-                  <a:txBody>
-                    <a:bodyPr/>
-                    <a:lstStyle/>
-                    <a:p>
-                      <a:pPr algn="l"/>
-                      <a:r>
-                        <a:rPr sz="1100" b="0">
-                          <a:solidFill>
-                            <a:srgbClr val="1A1A2E"/>
-                          </a:solidFill>
-                        </a:rPr>
-                        <a:t>⑤</a:t>
-                      </a:r>
-                    </a:p>
-                  </a:txBody>
-                  <a:tcPr>
-                    <a:solidFill>
-                      <a:srgbClr val="F5F5F5"/>
-                    </a:solidFill>
-                  </a:tcPr>
-                </a:tc>
-                <a:tc>
-                  <a:txBody>
-                    <a:bodyPr/>
-                    <a:lstStyle/>
-                    <a:p>
-                      <a:pPr algn="ctr"/>
-                      <a:r>
-                        <a:rPr sz="1100" b="0">
-                          <a:solidFill>
-                            <a:srgbClr val="1A1A2E"/>
-                          </a:solidFill>
-                        </a:rPr>
-                        <a:t>다병원 분석</a:t>
-                      </a:r>
-                    </a:p>
-                  </a:txBody>
-                  <a:tcPr>
-                    <a:solidFill>
-                      <a:srgbClr val="F5F5F5"/>
-                    </a:solidFill>
-                  </a:tcPr>
-                </a:tc>
-                <a:tc>
-                  <a:txBody>
-                    <a:bodyPr/>
-                    <a:lstStyle/>
-                    <a:p>
-                      <a:pPr algn="ctr"/>
-                      <a:r>
-                        <a:rPr sz="1100" b="0">
-                          <a:solidFill>
-                            <a:srgbClr val="1A1A2E"/>
-                          </a:solidFill>
-                        </a:rPr>
-                        <a:t>강남 단독</a:t>
-                      </a:r>
-                    </a:p>
-                    <a:p>
-                      <a:pPr algn="ctr"/>
-                      <a:r>
-                        <a:rPr sz="1100" b="0">
-                          <a:solidFill>
-                            <a:srgbClr val="1A1A2E"/>
-                          </a:solidFill>
-                        </a:rPr>
-                        <a:t>(config.SITE 수동 변경)</a:t>
-                      </a:r>
-                    </a:p>
-                  </a:txBody>
-                  <a:tcPr>
-                    <a:solidFill>
-                      <a:srgbClr val="F5F5F5"/>
-                    </a:solidFill>
-                  </a:tcPr>
-                </a:tc>
-                <a:tc>
-                  <a:txBody>
-                    <a:bodyPr/>
-                    <a:lstStyle/>
-                    <a:p>
-                      <a:pPr algn="ctr"/>
-                      <a:r>
-                        <a:rPr sz="1100" b="0">
-                          <a:solidFill>
-                            <a:srgbClr val="1A1A2E"/>
-                          </a:solidFill>
-                        </a:rPr>
-                        <a:t>강남·신촌 자동 순회 +</a:t>
-                      </a:r>
-                    </a:p>
-                    <a:p>
-                      <a:pPr algn="ctr"/>
-                      <a:r>
-                        <a:rPr sz="1100" b="0">
-                          <a:solidFill>
-                            <a:srgbClr val="1A1A2E"/>
-                          </a:solidFill>
-                        </a:rPr>
-                        <a:t>교차 병원 비교(외부 검증)</a:t>
-                      </a:r>
-                    </a:p>
-                  </a:txBody>
-                  <a:tcPr>
-                    <a:solidFill>
-                      <a:srgbClr val="F5F5F5"/>
-                    </a:solidFill>
-                  </a:tcPr>
-                </a:tc>
-                <a:tc>
-                  <a:txBody>
-                    <a:bodyPr/>
-                    <a:lstStyle/>
-                    <a:p>
-                      <a:pPr algn="ctr"/>
-                      <a:r>
-                        <a:rPr sz="1100" b="0">
-                          <a:solidFill>
-                            <a:srgbClr val="1A1A2E"/>
-                          </a:solidFill>
-                        </a:rPr>
-                        <a:t>재현성(generalizability) 확인</a:t>
-                      </a:r>
-                    </a:p>
-                  </a:txBody>
-                  <a:tcPr>
-                    <a:solidFill>
-                      <a:srgbClr val="F5F5F5"/>
                     </a:solidFill>
                   </a:tcPr>
                 </a:tc>
@@ -14683,7 +13492,7 @@
                   <a:srgbClr val="FFFFFF"/>
                 </a:solidFill>
               </a:rPr>
-              <a:t>④ 성별 층화 분석 신설</a:t>
+              <a:t>④ 다병원 자동 순회 + 교차 병원 비교</a:t>
             </a:r>
           </a:p>
         </p:txBody>
@@ -14717,7 +13526,7 @@
                   <a:srgbClr val="BDD7EE"/>
                 </a:solidFill>
               </a:rPr>
-              <a:t>0424: 성별을 공변량으로만  →  0430: 전체 / 여성 / 남성 독립 모델</a:t>
+              <a:t>0424: 강남 단독  →  0430: 강남·신촌 자동 순회 + 외부 검증</a:t>
             </a:r>
           </a:p>
         </p:txBody>
@@ -14731,13 +13540,13 @@
         <p:spPr>
           <a:xfrm>
             <a:off x="182880" y="1097280"/>
-            <a:ext cx="5394960" cy="2926080"/>
+            <a:ext cx="4572000" cy="5303520"/>
           </a:xfrm>
           <a:prstGeom prst="rect">
             <a:avLst/>
           </a:prstGeom>
           <a:solidFill>
-            <a:srgbClr val="FFF0F0"/>
+            <a:srgbClr val="F5F5FF"/>
           </a:solidFill>
           <a:ln>
             <a:noFill/>
@@ -14774,7 +13583,7 @@
         <p:spPr>
           <a:xfrm>
             <a:off x="320040" y="1170432"/>
-            <a:ext cx="1682495" cy="320040"/>
+            <a:ext cx="1097280" cy="320040"/>
           </a:xfrm>
           <a:prstGeom prst="rect">
             <a:avLst/>
@@ -14817,7 +13626,7 @@
         <p:spPr>
           <a:xfrm>
             <a:off x="365759" y="1188720"/>
-            <a:ext cx="1591055" cy="283464"/>
+            <a:ext cx="1005839" cy="283464"/>
           </a:xfrm>
           <a:prstGeom prst="rect">
             <a:avLst/>
@@ -14837,7 +13646,7 @@
                   <a:srgbClr val="FFFFFF"/>
                 </a:solidFill>
               </a:rPr>
-              <a:t>0424 접근법</a:t>
+              <a:t>0424</a:t>
             </a:r>
           </a:p>
         </p:txBody>
@@ -14851,7 +13660,7 @@
         <p:spPr>
           <a:xfrm>
             <a:off x="365760" y="1554480"/>
-            <a:ext cx="5120640" cy="320040"/>
+            <a:ext cx="4297680" cy="301752"/>
           </a:xfrm>
           <a:prstGeom prst="rect">
             <a:avLst/>
@@ -14871,7 +13680,7 @@
                   <a:srgbClr val="1A1A2E"/>
                 </a:solidFill>
               </a:rPr>
-              <a:t>• 성별(PatientSex)을 0/1 더미 변수로 포함</a:t>
+              <a:t>• config.py의 SITE 변수를</a:t>
             </a:r>
           </a:p>
         </p:txBody>
@@ -14884,8 +13693,8 @@
         </p:nvSpPr>
         <p:spPr>
           <a:xfrm>
-            <a:off x="365760" y="1874519"/>
-            <a:ext cx="5120640" cy="320040"/>
+            <a:off x="365760" y="1856231"/>
+            <a:ext cx="4297680" cy="301752"/>
           </a:xfrm>
           <a:prstGeom prst="rect">
             <a:avLst/>
@@ -14905,7 +13714,7 @@
                   <a:srgbClr val="1A1A2E"/>
                 </a:solidFill>
               </a:rPr>
-              <a:t>• 전체 데이터에 단일 모델 적합</a:t>
+              <a:t>  연구자가 수동 변경</a:t>
             </a:r>
           </a:p>
         </p:txBody>
@@ -14918,8 +13727,8 @@
         </p:nvSpPr>
         <p:spPr>
           <a:xfrm>
-            <a:off x="365760" y="2194560"/>
-            <a:ext cx="5120640" cy="320040"/>
+            <a:off x="365760" y="2157984"/>
+            <a:ext cx="4297680" cy="301752"/>
           </a:xfrm>
           <a:prstGeom prst="rect">
             <a:avLst/>
@@ -14939,7 +13748,7 @@
                   <a:srgbClr val="1A1A2E"/>
                 </a:solidFill>
               </a:rPr>
-              <a:t>• 성별 간 이질성(heterogeneity) 미탐색</a:t>
+              <a:t>• 강남만 분석 (신촌 별도 실행 필요)</a:t>
             </a:r>
           </a:p>
         </p:txBody>
@@ -14952,8 +13761,8 @@
         </p:nvSpPr>
         <p:spPr>
           <a:xfrm>
-            <a:off x="365760" y="2514600"/>
-            <a:ext cx="5120640" cy="320040"/>
+            <a:off x="365760" y="2459736"/>
+            <a:ext cx="4297680" cy="301752"/>
           </a:xfrm>
           <a:prstGeom prst="rect">
             <a:avLst/>
@@ -14973,123 +13782,21 @@
                   <a:srgbClr val="1A1A2E"/>
                 </a:solidFill>
               </a:rPr>
-              <a:t/>
-            </a:r>
-          </a:p>
-        </p:txBody>
-      </p:sp>
-      <p:sp>
-        <p:nvSpPr>
-          <p:cNvPr id="12" name="TextBox 11"/>
-          <p:cNvSpPr txBox="1"/>
-          <p:nvPr/>
-        </p:nvSpPr>
-        <p:spPr>
-          <a:xfrm>
-            <a:off x="365760" y="2834639"/>
-            <a:ext cx="5120640" cy="320040"/>
-          </a:xfrm>
-          <a:prstGeom prst="rect">
-            <a:avLst/>
-          </a:prstGeom>
-          <a:noFill/>
-        </p:spPr>
-        <p:txBody>
-          <a:bodyPr wrap="square">
-            <a:spAutoFit/>
-          </a:bodyPr>
-          <a:lstStyle/>
-          <a:p>
-            <a:pPr algn="l"/>
-            <a:r>
-              <a:rPr sz="1200" b="0" i="0">
-                <a:solidFill>
-                  <a:srgbClr val="C00000"/>
-                </a:solidFill>
-              </a:rPr>
-              <a:t>▲ 한계: 근감소증 위험도 및 AEC 신호</a:t>
-            </a:r>
-          </a:p>
-        </p:txBody>
-      </p:sp>
-      <p:sp>
-        <p:nvSpPr>
-          <p:cNvPr id="13" name="TextBox 12"/>
-          <p:cNvSpPr txBox="1"/>
-          <p:nvPr/>
-        </p:nvSpPr>
-        <p:spPr>
-          <a:xfrm>
-            <a:off x="365760" y="3154680"/>
-            <a:ext cx="5120640" cy="320040"/>
-          </a:xfrm>
-          <a:prstGeom prst="rect">
-            <a:avLst/>
-          </a:prstGeom>
-          <a:noFill/>
-        </p:spPr>
-        <p:txBody>
-          <a:bodyPr wrap="square">
-            <a:spAutoFit/>
-          </a:bodyPr>
-          <a:lstStyle/>
-          <a:p>
-            <a:pPr algn="l"/>
-            <a:r>
-              <a:rPr sz="1200" b="0" i="0">
-                <a:solidFill>
-                  <a:srgbClr val="1A1A2E"/>
-                </a:solidFill>
-              </a:rPr>
-              <a:t>   특성이 성별에 따라 다를 수 있음</a:t>
-            </a:r>
-          </a:p>
-        </p:txBody>
-      </p:sp>
-      <p:sp>
-        <p:nvSpPr>
-          <p:cNvPr id="14" name="TextBox 13"/>
-          <p:cNvSpPr txBox="1"/>
-          <p:nvPr/>
-        </p:nvSpPr>
-        <p:spPr>
-          <a:xfrm>
-            <a:off x="365760" y="3474720"/>
-            <a:ext cx="5120640" cy="320040"/>
-          </a:xfrm>
-          <a:prstGeom prst="rect">
-            <a:avLst/>
-          </a:prstGeom>
-          <a:noFill/>
-        </p:spPr>
-        <p:txBody>
-          <a:bodyPr wrap="square">
-            <a:spAutoFit/>
-          </a:bodyPr>
-          <a:lstStyle/>
-          <a:p>
-            <a:pPr algn="l"/>
-            <a:r>
-              <a:rPr sz="1200" b="0" i="0">
-                <a:solidFill>
-                  <a:srgbClr val="1A1A2E"/>
-                </a:solidFill>
-              </a:rPr>
-              <a:t>   → 교호작용 없이는 이질성 포착 불가</a:t>
-            </a:r>
-          </a:p>
-        </p:txBody>
-      </p:sp>
-      <p:sp>
-        <p:nvSpPr>
-          <p:cNvPr id="15" name="Rectangle 14"/>
+              <a:t>• 재현성 비교 구조 없음</a:t>
+            </a:r>
+          </a:p>
+        </p:txBody>
+      </p:sp>
+      <p:sp>
+        <p:nvSpPr>
+          <p:cNvPr id="12" name="Rectangle 11"/>
           <p:cNvSpPr/>
           <p:nvPr/>
         </p:nvSpPr>
         <p:spPr>
           <a:xfrm>
-            <a:off x="5943600" y="1097280"/>
-            <a:ext cx="6080760" cy="2926080"/>
+            <a:off x="182880" y="2926080"/>
+            <a:ext cx="4572000" cy="3474720"/>
           </a:xfrm>
           <a:prstGeom prst="rect">
             <a:avLst/>
@@ -15125,14 +13832,14 @@
       </p:sp>
       <p:sp>
         <p:nvSpPr>
-          <p:cNvPr id="16" name="Rectangle 15"/>
+          <p:cNvPr id="13" name="Rectangle 12"/>
           <p:cNvSpPr/>
           <p:nvPr/>
         </p:nvSpPr>
         <p:spPr>
           <a:xfrm>
-            <a:off x="6080760" y="1170432"/>
-            <a:ext cx="2011679" cy="320040"/>
+            <a:off x="320040" y="2999232"/>
+            <a:ext cx="1097280" cy="320040"/>
           </a:xfrm>
           <a:prstGeom prst="rect">
             <a:avLst/>
@@ -15168,14 +13875,14 @@
       </p:sp>
       <p:sp>
         <p:nvSpPr>
-          <p:cNvPr id="17" name="TextBox 16"/>
+          <p:cNvPr id="14" name="TextBox 13"/>
           <p:cNvSpPr txBox="1"/>
           <p:nvPr/>
         </p:nvSpPr>
         <p:spPr>
           <a:xfrm>
-            <a:off x="6126480" y="1188720"/>
-            <a:ext cx="1920239" cy="283464"/>
+            <a:off x="365759" y="3017520"/>
+            <a:ext cx="1005839" cy="283464"/>
           </a:xfrm>
           <a:prstGeom prst="rect">
             <a:avLst/>
@@ -15195,21 +13902,21 @@
                   <a:srgbClr val="FFFFFF"/>
                 </a:solidFill>
               </a:rPr>
-              <a:t>0430 층화 전략</a:t>
-            </a:r>
-          </a:p>
-        </p:txBody>
-      </p:sp>
-      <p:sp>
-        <p:nvSpPr>
-          <p:cNvPr id="18" name="TextBox 17"/>
+              <a:t>0430</a:t>
+            </a:r>
+          </a:p>
+        </p:txBody>
+      </p:sp>
+      <p:sp>
+        <p:nvSpPr>
+          <p:cNvPr id="15" name="TextBox 14"/>
           <p:cNvSpPr txBox="1"/>
           <p:nvPr/>
         </p:nvSpPr>
         <p:spPr>
           <a:xfrm>
-            <a:off x="6080760" y="1554480"/>
-            <a:ext cx="5760720" cy="320040"/>
+            <a:off x="365760" y="3383280"/>
+            <a:ext cx="4297680" cy="301752"/>
           </a:xfrm>
           <a:prstGeom prst="rect">
             <a:avLst/>
@@ -15229,21 +13936,21 @@
                   <a:srgbClr val="1A1A2E"/>
                 </a:solidFill>
               </a:rPr>
-              <a:t>• 전체(All) / 여성(F) / 남성(M) 3개 서브그룹</a:t>
-            </a:r>
-          </a:p>
-        </p:txBody>
-      </p:sp>
-      <p:sp>
-        <p:nvSpPr>
-          <p:cNvPr id="19" name="TextBox 18"/>
+              <a:t>• data/ 폴더 자동 스캔</a:t>
+            </a:r>
+          </a:p>
+        </p:txBody>
+      </p:sp>
+      <p:sp>
+        <p:nvSpPr>
+          <p:cNvPr id="16" name="TextBox 15"/>
           <p:cNvSpPr txBox="1"/>
           <p:nvPr/>
         </p:nvSpPr>
         <p:spPr>
           <a:xfrm>
-            <a:off x="6080760" y="1874519"/>
-            <a:ext cx="5760720" cy="320040"/>
+            <a:off x="365760" y="3685032"/>
+            <a:ext cx="4297680" cy="301752"/>
           </a:xfrm>
           <a:prstGeom prst="rect">
             <a:avLst/>
@@ -15263,21 +13970,21 @@
                   <a:srgbClr val="1A1A2E"/>
                 </a:solidFill>
               </a:rPr>
-              <a:t>  → 각 그룹에 Case 1~5 독립 모델 적합</a:t>
-            </a:r>
-          </a:p>
-        </p:txBody>
-      </p:sp>
-      <p:sp>
-        <p:nvSpPr>
-          <p:cNvPr id="20" name="TextBox 19"/>
+              <a:t>  강남·신촌 모두 순회</a:t>
+            </a:r>
+          </a:p>
+        </p:txBody>
+      </p:sp>
+      <p:sp>
+        <p:nvSpPr>
+          <p:cNvPr id="17" name="TextBox 16"/>
           <p:cNvSpPr txBox="1"/>
           <p:nvPr/>
         </p:nvSpPr>
         <p:spPr>
           <a:xfrm>
-            <a:off x="6080760" y="2194560"/>
-            <a:ext cx="5760720" cy="320040"/>
+            <a:off x="365760" y="3986784"/>
+            <a:ext cx="4297680" cy="301752"/>
           </a:xfrm>
           <a:prstGeom prst="rect">
             <a:avLst/>
@@ -15297,21 +14004,21 @@
                   <a:srgbClr val="1A1A2E"/>
                 </a:solidFill>
               </a:rPr>
-              <a:t>• 층화 그룹에서는 PatientSex 제거</a:t>
-            </a:r>
-          </a:p>
-        </p:txBody>
-      </p:sp>
-      <p:sp>
-        <p:nvSpPr>
-          <p:cNvPr id="21" name="TextBox 20"/>
+              <a:t>• 강남 학습 → 신촌 외부 검증</a:t>
+            </a:r>
+          </a:p>
+        </p:txBody>
+      </p:sp>
+      <p:sp>
+        <p:nvSpPr>
+          <p:cNvPr id="18" name="TextBox 17"/>
           <p:cNvSpPr txBox="1"/>
           <p:nvPr/>
         </p:nvSpPr>
         <p:spPr>
           <a:xfrm>
-            <a:off x="6080760" y="2514600"/>
-            <a:ext cx="5760720" cy="320040"/>
+            <a:off x="365760" y="4288536"/>
+            <a:ext cx="4297680" cy="301752"/>
           </a:xfrm>
           <a:prstGeom prst="rect">
             <a:avLst/>
@@ -15331,21 +14038,21 @@
                   <a:srgbClr val="1A1A2E"/>
                 </a:solidFill>
               </a:rPr>
-              <a:t>  (내재적 보정 — 별도 더미 불필요)</a:t>
-            </a:r>
-          </a:p>
-        </p:txBody>
-      </p:sp>
-      <p:sp>
-        <p:nvSpPr>
-          <p:cNvPr id="22" name="TextBox 21"/>
+              <a:t>  (Cross-hospital validation)</a:t>
+            </a:r>
+          </a:p>
+        </p:txBody>
+      </p:sp>
+      <p:sp>
+        <p:nvSpPr>
+          <p:cNvPr id="19" name="TextBox 18"/>
           <p:cNvSpPr txBox="1"/>
           <p:nvPr/>
         </p:nvSpPr>
         <p:spPr>
           <a:xfrm>
-            <a:off x="6080760" y="2834639"/>
-            <a:ext cx="5760720" cy="320040"/>
+            <a:off x="365760" y="4590288"/>
+            <a:ext cx="4297680" cy="301752"/>
           </a:xfrm>
           <a:prstGeom prst="rect">
             <a:avLst/>
@@ -15365,21 +14072,21 @@
                   <a:srgbClr val="1A1A2E"/>
                 </a:solidFill>
               </a:rPr>
-              <a:t/>
-            </a:r>
-          </a:p>
-        </p:txBody>
-      </p:sp>
-      <p:sp>
-        <p:nvSpPr>
-          <p:cNvPr id="23" name="TextBox 22"/>
+              <a:t>• 피처 선택도 3개 데이터셋 독립 실행:</a:t>
+            </a:r>
+          </a:p>
+        </p:txBody>
+      </p:sp>
+      <p:sp>
+        <p:nvSpPr>
+          <p:cNvPr id="20" name="TextBox 19"/>
           <p:cNvSpPr txBox="1"/>
           <p:nvPr/>
         </p:nvSpPr>
         <p:spPr>
           <a:xfrm>
-            <a:off x="6080760" y="3154680"/>
-            <a:ext cx="5760720" cy="320040"/>
+            <a:off x="365760" y="4892040"/>
+            <a:ext cx="4297680" cy="301752"/>
           </a:xfrm>
           <a:prstGeom prst="rect">
             <a:avLst/>
@@ -15396,24 +14103,24 @@
             <a:r>
               <a:rPr sz="1200" b="0" i="0">
                 <a:solidFill>
-                  <a:srgbClr val="008B45"/>
+                  <a:srgbClr val="1A1A2E"/>
                 </a:solidFill>
               </a:rPr>
-              <a:t>★ 분석 설계: 교호작용 항 추가 대신</a:t>
-            </a:r>
-          </a:p>
-        </p:txBody>
-      </p:sp>
-      <p:sp>
-        <p:nvSpPr>
-          <p:cNvPr id="24" name="TextBox 23"/>
+              <a:t>  강남 / 신촌 / 병합(공통 피처)</a:t>
+            </a:r>
+          </a:p>
+        </p:txBody>
+      </p:sp>
+      <p:sp>
+        <p:nvSpPr>
+          <p:cNvPr id="21" name="TextBox 20"/>
           <p:cNvSpPr txBox="1"/>
           <p:nvPr/>
         </p:nvSpPr>
         <p:spPr>
           <a:xfrm>
-            <a:off x="6080760" y="3474720"/>
-            <a:ext cx="5760720" cy="320040"/>
+            <a:off x="365760" y="5193792"/>
+            <a:ext cx="4297680" cy="301752"/>
           </a:xfrm>
           <a:prstGeom prst="rect">
             <a:avLst/>
@@ -15433,21 +14140,21 @@
                   <a:srgbClr val="1A1A2E"/>
                 </a:solidFill>
               </a:rPr>
-              <a:t>   층화 전략으로 이질성 탐색</a:t>
-            </a:r>
-          </a:p>
-        </p:txBody>
-      </p:sp>
-      <p:sp>
-        <p:nvSpPr>
-          <p:cNvPr id="25" name="TextBox 24"/>
+              <a:t>• 재현성 히트맵으로 공통 피처 확인</a:t>
+            </a:r>
+          </a:p>
+        </p:txBody>
+      </p:sp>
+      <p:sp>
+        <p:nvSpPr>
+          <p:cNvPr id="22" name="TextBox 21"/>
           <p:cNvSpPr txBox="1"/>
           <p:nvPr/>
         </p:nvSpPr>
         <p:spPr>
           <a:xfrm>
-            <a:off x="6080760" y="3794759"/>
-            <a:ext cx="5760720" cy="320040"/>
+            <a:off x="4983480" y="1051560"/>
+            <a:ext cx="7040880" cy="320040"/>
           </a:xfrm>
           <a:prstGeom prst="rect">
             <a:avLst/>
@@ -15462,112 +14169,50 @@
           <a:p>
             <a:pPr algn="l"/>
             <a:r>
-              <a:rPr sz="1200" b="0" i="0">
-                <a:solidFill>
-                  <a:srgbClr val="1A1A2E"/>
+              <a:rPr sz="1200" b="1" i="0">
+                <a:solidFill>
+                  <a:srgbClr val="1A355E"/>
                 </a:solidFill>
               </a:rPr>
-              <a:t>   → 그룹별 계수·AUC 직접 비교 가능</a:t>
-            </a:r>
-          </a:p>
-        </p:txBody>
-      </p:sp>
-      <p:sp>
-        <p:nvSpPr>
-          <p:cNvPr id="26" name="Rectangle 25"/>
-          <p:cNvSpPr/>
-          <p:nvPr/>
-        </p:nvSpPr>
-        <p:spPr>
-          <a:xfrm>
-            <a:off x="182880" y="4160520"/>
-            <a:ext cx="11795760" cy="2468880"/>
-          </a:xfrm>
-          <a:prstGeom prst="rect">
-            <a:avLst/>
-          </a:prstGeom>
-          <a:solidFill>
-            <a:srgbClr val="EEEEFF"/>
-          </a:solidFill>
-          <a:ln>
-            <a:noFill/>
-          </a:ln>
-        </p:spPr>
-        <p:style>
-          <a:lnRef idx="1">
-            <a:schemeClr val="accent1"/>
-          </a:lnRef>
-          <a:fillRef idx="3">
-            <a:schemeClr val="accent1"/>
-          </a:fillRef>
-          <a:effectRef idx="2">
-            <a:schemeClr val="accent1"/>
-          </a:effectRef>
-          <a:fontRef idx="minor">
-            <a:schemeClr val="lt1"/>
-          </a:fontRef>
-        </p:style>
-        <p:txBody>
-          <a:bodyPr rtlCol="0" anchor="ctr"/>
-          <a:lstStyle/>
-          <a:p>
-            <a:pPr algn="ctr"/>
-          </a:p>
-        </p:txBody>
-      </p:sp>
-      <p:sp>
-        <p:nvSpPr>
-          <p:cNvPr id="27" name="Rectangle 26"/>
-          <p:cNvSpPr/>
-          <p:nvPr/>
-        </p:nvSpPr>
-        <p:spPr>
-          <a:xfrm>
-            <a:off x="320040" y="4224528"/>
-            <a:ext cx="3328415" cy="320040"/>
-          </a:xfrm>
-          <a:prstGeom prst="rect">
-            <a:avLst/>
-          </a:prstGeom>
-          <a:solidFill>
-            <a:srgbClr val="2E75B6"/>
-          </a:solidFill>
-          <a:ln>
-            <a:noFill/>
-          </a:ln>
-        </p:spPr>
-        <p:style>
-          <a:lnRef idx="1">
-            <a:schemeClr val="accent1"/>
-          </a:lnRef>
-          <a:fillRef idx="3">
-            <a:schemeClr val="accent1"/>
-          </a:fillRef>
-          <a:effectRef idx="2">
-            <a:schemeClr val="accent1"/>
-          </a:effectRef>
-          <a:fontRef idx="minor">
-            <a:schemeClr val="lt1"/>
-          </a:fontRef>
-        </p:style>
-        <p:txBody>
-          <a:bodyPr rtlCol="0" anchor="ctr"/>
-          <a:lstStyle/>
-          <a:p>
-            <a:pPr algn="ctr"/>
-          </a:p>
-        </p:txBody>
-      </p:sp>
-      <p:sp>
-        <p:nvSpPr>
-          <p:cNvPr id="28" name="TextBox 27"/>
+              <a:t>교차 병원 비교 (강남 → 신촌 외부 검증)</a:t>
+            </a:r>
+          </a:p>
+        </p:txBody>
+      </p:sp>
+      <p:pic>
+        <p:nvPicPr>
+          <p:cNvPr id="23" name="Picture 22" descr="09_cross_hospital_comparison.png"/>
+          <p:cNvPicPr>
+            <a:picLocks noChangeAspect="1"/>
+          </p:cNvPicPr>
+          <p:nvPr/>
+        </p:nvPicPr>
+        <p:blipFill>
+          <a:blip r:embed="rId2"/>
+          <a:stretch>
+            <a:fillRect/>
+          </a:stretch>
+        </p:blipFill>
+        <p:spPr>
+          <a:xfrm>
+            <a:off x="4983480" y="1417320"/>
+            <a:ext cx="7040880" cy="2743200"/>
+          </a:xfrm>
+          <a:prstGeom prst="rect">
+            <a:avLst/>
+          </a:prstGeom>
+        </p:spPr>
+      </p:pic>
+      <p:sp>
+        <p:nvSpPr>
+          <p:cNvPr id="24" name="TextBox 23"/>
           <p:cNvSpPr txBox="1"/>
           <p:nvPr/>
         </p:nvSpPr>
         <p:spPr>
           <a:xfrm>
-            <a:off x="365759" y="4242816"/>
-            <a:ext cx="3236975" cy="283464"/>
+            <a:off x="4983480" y="4251960"/>
+            <a:ext cx="7040880" cy="320040"/>
           </a:xfrm>
           <a:prstGeom prst="rect">
             <a:avLst/>
@@ -15580,282 +14225,42 @@
           </a:bodyPr>
           <a:lstStyle/>
           <a:p>
-            <a:pPr algn="ctr"/>
-            <a:r>
-              <a:rPr sz="1300" b="1" i="0">
-                <a:solidFill>
-                  <a:srgbClr val="FFFFFF"/>
+            <a:pPr algn="l"/>
+            <a:r>
+              <a:rPr sz="1200" b="1" i="0">
+                <a:solidFill>
+                  <a:srgbClr val="1A355E"/>
                 </a:solidFill>
               </a:rPr>
-              <a:t>연관 변경: 이진화 임계값 단순화</a:t>
-            </a:r>
-          </a:p>
-        </p:txBody>
-      </p:sp>
-      <p:graphicFrame>
-        <p:nvGraphicFramePr>
-          <p:cNvPr id="29" name="Table 28"/>
-          <p:cNvGraphicFramePr>
-            <a:graphicFrameLocks noGrp="1"/>
-          </p:cNvGraphicFramePr>
-          <p:nvPr/>
-        </p:nvGraphicFramePr>
-        <p:xfrm>
-          <a:off x="182880" y="4617720"/>
-          <a:ext cx="11795760" cy="1691640"/>
-        </p:xfrm>
-        <a:graphic>
-          <a:graphicData uri="http://schemas.openxmlformats.org/drawingml/2006/table">
-            <a:tbl>
-              <a:tblPr firstRow="1" bandRow="1">
-                <a:tableStyleId>{5C22544A-7EE6-4342-B048-85BDC9FD1C3A}</a:tableStyleId>
-              </a:tblPr>
-              <a:tblGrid>
-                <a:gridCol w="3931920"/>
-                <a:gridCol w="3931920"/>
-                <a:gridCol w="3931920"/>
-              </a:tblGrid>
-              <a:tr h="563880">
-                <a:tc>
-                  <a:txBody>
-                    <a:bodyPr/>
-                    <a:lstStyle/>
-                    <a:p>
-                      <a:pPr algn="ctr"/>
-                      <a:r>
-                        <a:rPr sz="1100" b="1">
-                          <a:solidFill>
-                            <a:srgbClr val="FFFFFF"/>
-                          </a:solidFill>
-                        </a:rPr>
-                        <a:t>버전</a:t>
-                      </a:r>
-                    </a:p>
-                  </a:txBody>
-                  <a:tcPr>
-                    <a:solidFill>
-                      <a:srgbClr val="2E75B6"/>
-                    </a:solidFill>
-                  </a:tcPr>
-                </a:tc>
-                <a:tc>
-                  <a:txBody>
-                    <a:bodyPr/>
-                    <a:lstStyle/>
-                    <a:p>
-                      <a:pPr algn="ctr"/>
-                      <a:r>
-                        <a:rPr sz="1100" b="1">
-                          <a:solidFill>
-                            <a:srgbClr val="FFFFFF"/>
-                          </a:solidFill>
-                        </a:rPr>
-                        <a:t>방법</a:t>
-                      </a:r>
-                    </a:p>
-                  </a:txBody>
-                  <a:tcPr>
-                    <a:solidFill>
-                      <a:srgbClr val="2E75B6"/>
-                    </a:solidFill>
-                  </a:tcPr>
-                </a:tc>
-                <a:tc>
-                  <a:txBody>
-                    <a:bodyPr/>
-                    <a:lstStyle/>
-                    <a:p>
-                      <a:pPr algn="ctr"/>
-                      <a:r>
-                        <a:rPr sz="1100" b="1">
-                          <a:solidFill>
-                            <a:srgbClr val="FFFFFF"/>
-                          </a:solidFill>
-                        </a:rPr>
-                        <a:t>효과</a:t>
-                      </a:r>
-                    </a:p>
-                  </a:txBody>
-                  <a:tcPr>
-                    <a:solidFill>
-                      <a:srgbClr val="2E75B6"/>
-                    </a:solidFill>
-                  </a:tcPr>
-                </a:tc>
-              </a:tr>
-              <a:tr h="563880">
-                <a:tc>
-                  <a:txBody>
-                    <a:bodyPr/>
-                    <a:lstStyle/>
-                    <a:p>
-                      <a:pPr algn="l"/>
-                      <a:r>
-                        <a:rPr sz="1100" b="0">
-                          <a:solidFill>
-                            <a:srgbClr val="1A1A2E"/>
-                          </a:solidFill>
-                        </a:rPr>
-                        <a:t>0424</a:t>
-                      </a:r>
-                    </a:p>
-                  </a:txBody>
-                  <a:tcPr>
-                    <a:solidFill>
-                      <a:srgbClr val="FFEBEB"/>
-                    </a:solidFill>
-                  </a:tcPr>
-                </a:tc>
-                <a:tc>
-                  <a:txBody>
-                    <a:bodyPr/>
-                    <a:lstStyle/>
-                    <a:p>
-                      <a:pPr algn="ctr"/>
-                      <a:r>
-                        <a:rPr sz="1100" b="0">
-                          <a:solidFill>
-                            <a:srgbClr val="1A1A2E"/>
-                          </a:solidFill>
-                        </a:rPr>
-                        <a:t>성별 특이적 P25</a:t>
-                      </a:r>
-                    </a:p>
-                    <a:p>
-                      <a:pPr algn="ctr"/>
-                      <a:r>
-                        <a:rPr sz="1100" b="0">
-                          <a:solidFill>
-                            <a:srgbClr val="1A1A2E"/>
-                          </a:solidFill>
-                        </a:rPr>
-                        <a:t>남성 P25, 여성 P25 별도 산출</a:t>
-                      </a:r>
-                    </a:p>
-                  </a:txBody>
-                  <a:tcPr>
-                    <a:solidFill>
-                      <a:srgbClr val="FFEBEB"/>
-                    </a:solidFill>
-                  </a:tcPr>
-                </a:tc>
-                <a:tc>
-                  <a:txBody>
-                    <a:bodyPr/>
-                    <a:lstStyle/>
-                    <a:p>
-                      <a:pPr algn="ctr"/>
-                      <a:r>
-                        <a:rPr sz="1100" b="0">
-                          <a:solidFill>
-                            <a:srgbClr val="1A1A2E"/>
-                          </a:solidFill>
-                        </a:rPr>
-                        <a:t>전체 데이터에 단일 임계값 불가 — 성별 병합 분석과 불일치</a:t>
-                      </a:r>
-                    </a:p>
-                  </a:txBody>
-                  <a:tcPr>
-                    <a:solidFill>
-                      <a:srgbClr val="FFEBEB"/>
-                    </a:solidFill>
-                  </a:tcPr>
-                </a:tc>
-              </a:tr>
-              <a:tr h="563880">
-                <a:tc>
-                  <a:txBody>
-                    <a:bodyPr/>
-                    <a:lstStyle/>
-                    <a:p>
-                      <a:pPr algn="l"/>
-                      <a:r>
-                        <a:rPr sz="1100" b="0">
-                          <a:solidFill>
-                            <a:srgbClr val="1A1A2E"/>
-                          </a:solidFill>
-                        </a:rPr>
-                        <a:t>0430</a:t>
-                      </a:r>
-                    </a:p>
-                  </a:txBody>
-                  <a:tcPr>
-                    <a:solidFill>
-                      <a:srgbClr val="EBFFEB"/>
-                    </a:solidFill>
-                  </a:tcPr>
-                </a:tc>
-                <a:tc>
-                  <a:txBody>
-                    <a:bodyPr/>
-                    <a:lstStyle/>
-                    <a:p>
-                      <a:pPr algn="ctr"/>
-                      <a:r>
-                        <a:rPr sz="1100" b="0">
-                          <a:solidFill>
-                            <a:srgbClr val="1A1A2E"/>
-                          </a:solidFill>
-                        </a:rPr>
-                        <a:t>분석 그룹 내 하위 25% 동적 산출</a:t>
-                      </a:r>
-                    </a:p>
-                    <a:p>
-                      <a:pPr algn="ctr"/>
-                      <a:r>
-                        <a:rPr sz="1100" b="0">
-                          <a:solidFill>
-                            <a:srgbClr val="1A1A2E"/>
-                          </a:solidFill>
-                        </a:rPr>
-                        <a:t>전체/여성/남성 각 그룹에서 독립 P25</a:t>
-                      </a:r>
-                    </a:p>
-                  </a:txBody>
-                  <a:tcPr>
-                    <a:solidFill>
-                      <a:srgbClr val="EBFFEB"/>
-                    </a:solidFill>
-                  </a:tcPr>
-                </a:tc>
-                <a:tc>
-                  <a:txBody>
-                    <a:bodyPr/>
-                    <a:lstStyle/>
-                    <a:p>
-                      <a:pPr algn="ctr"/>
-                      <a:r>
-                        <a:rPr sz="1100" b="0">
-                          <a:solidFill>
-                            <a:srgbClr val="1A1A2E"/>
-                          </a:solidFill>
-                        </a:rPr>
-                        <a:t>층화 분석과 완전 일관성 유지</a:t>
-                      </a:r>
-                    </a:p>
-                    <a:p>
-                      <a:pPr algn="ctr"/>
-                      <a:r>
-                        <a:rPr sz="1100" b="0">
-                          <a:solidFill>
-                            <a:srgbClr val="1A1A2E"/>
-                          </a:solidFill>
-                        </a:rPr>
-                        <a:t>그룹 크기·분포 변화에도 자동 대응</a:t>
-                      </a:r>
-                    </a:p>
-                  </a:txBody>
-                  <a:tcPr>
-                    <a:solidFill>
-                      <a:srgbClr val="EBFFEB"/>
-                    </a:solidFill>
-                  </a:tcPr>
-                </a:tc>
-              </a:tr>
-            </a:tbl>
-          </a:graphicData>
-        </a:graphic>
-      </p:graphicFrame>
+              <a:t>외부 검증 상세 결과</a:t>
+            </a:r>
+          </a:p>
+        </p:txBody>
+      </p:sp>
+      <p:pic>
+        <p:nvPicPr>
+          <p:cNvPr id="25" name="Picture 24" descr="10_external_validation.png"/>
+          <p:cNvPicPr>
+            <a:picLocks noChangeAspect="1"/>
+          </p:cNvPicPr>
+          <p:nvPr/>
+        </p:nvPicPr>
+        <p:blipFill>
+          <a:blip r:embed="rId3"/>
+          <a:stretch>
+            <a:fillRect/>
+          </a:stretch>
+        </p:blipFill>
+        <p:spPr>
+          <a:xfrm>
+            <a:off x="4983480" y="4617720"/>
+            <a:ext cx="7040880" cy="2103120"/>
+          </a:xfrm>
+          <a:prstGeom prst="rect">
+            <a:avLst/>
+          </a:prstGeom>
+        </p:spPr>
+      </p:pic>
     </p:spTree>
   </p:cSld>
   <p:clrMapOvr>

--- a/연구코드/results/0424_vs_0430_comparison.pptx
+++ b/연구코드/results/0424_vs_0430_comparison.pptx
@@ -4423,7 +4423,7 @@
                             <a:srgbClr val="1A1A2E"/>
                           </a:solidFill>
                         </a:rPr>
-                        <a:t>0.6620</a:t>
+                        <a:t>0.4865</a:t>
                       </a:r>
                     </a:p>
                   </a:txBody>
@@ -4445,7 +4445,7 @@
                             <a:srgbClr val="1A1A2E"/>
                           </a:solidFill>
                         </a:rPr>
-                        <a:t>17.12</a:t>
+                        <a:t>6.20</a:t>
                       </a:r>
                     </a:p>
                   </a:txBody>
@@ -4467,7 +4467,7 @@
                             <a:srgbClr val="1A1A2E"/>
                           </a:solidFill>
                         </a:rPr>
-                        <a:t>0.7427</a:t>
+                        <a:t>0.7707</a:t>
                       </a:r>
                     </a:p>
                   </a:txBody>
@@ -4513,7 +4513,7 @@
                             <a:srgbClr val="1A1A2E"/>
                           </a:solidFill>
                         </a:rPr>
-                        <a:t>0.6780</a:t>
+                        <a:t>0.4997</a:t>
                       </a:r>
                     </a:p>
                   </a:txBody>
@@ -4535,7 +4535,7 @@
                             <a:srgbClr val="1A1A2E"/>
                           </a:solidFill>
                         </a:rPr>
-                        <a:t>16.71</a:t>
+                        <a:t>6.13</a:t>
                       </a:r>
                     </a:p>
                   </a:txBody>
@@ -4557,7 +4557,7 @@
                             <a:srgbClr val="1A1A2E"/>
                           </a:solidFill>
                         </a:rPr>
-                        <a:t>0.7510</a:t>
+                        <a:t>0.7715</a:t>
                       </a:r>
                     </a:p>
                   </a:txBody>
@@ -4603,7 +4603,7 @@
                             <a:srgbClr val="1A1A2E"/>
                           </a:solidFill>
                         </a:rPr>
-                        <a:t>0.6694</a:t>
+                        <a:t>0.4960</a:t>
                       </a:r>
                     </a:p>
                   </a:txBody>
@@ -4625,7 +4625,7 @@
                             <a:srgbClr val="1A1A2E"/>
                           </a:solidFill>
                         </a:rPr>
-                        <a:t>16.93</a:t>
+                        <a:t>6.15</a:t>
                       </a:r>
                     </a:p>
                   </a:txBody>
@@ -4647,7 +4647,7 @@
                             <a:srgbClr val="1A1A2E"/>
                           </a:solidFill>
                         </a:rPr>
-                        <a:t>0.7442</a:t>
+                        <a:t>0.7710</a:t>
                       </a:r>
                     </a:p>
                   </a:txBody>
@@ -4693,7 +4693,7 @@
                             <a:srgbClr val="1A1A2E"/>
                           </a:solidFill>
                         </a:rPr>
-                        <a:t>0.6682</a:t>
+                        <a:t>0.4831</a:t>
                       </a:r>
                     </a:p>
                   </a:txBody>
@@ -4715,7 +4715,7 @@
                             <a:srgbClr val="1A1A2E"/>
                           </a:solidFill>
                         </a:rPr>
-                        <a:t>16.96</a:t>
+                        <a:t>6.23</a:t>
                       </a:r>
                     </a:p>
                   </a:txBody>
@@ -4737,7 +4737,7 @@
                             <a:srgbClr val="1A1A2E"/>
                           </a:solidFill>
                         </a:rPr>
-                        <a:t>0.7400</a:t>
+                        <a:t>0.7589</a:t>
                       </a:r>
                     </a:p>
                   </a:txBody>
@@ -4783,7 +4783,7 @@
                             <a:srgbClr val="1A1A2E"/>
                           </a:solidFill>
                         </a:rPr>
-                        <a:t>0.6620</a:t>
+                        <a:t>0.4830</a:t>
                       </a:r>
                     </a:p>
                   </a:txBody>
@@ -4805,7 +4805,7 @@
                             <a:srgbClr val="1A1A2E"/>
                           </a:solidFill>
                         </a:rPr>
-                        <a:t>17.11</a:t>
+                        <a:t>6.23</a:t>
                       </a:r>
                     </a:p>
                   </a:txBody>
@@ -4827,7 +4827,7 @@
                             <a:srgbClr val="1A1A2E"/>
                           </a:solidFill>
                         </a:rPr>
-                        <a:t>0.7311</a:t>
+                        <a:t>0.7564</a:t>
                       </a:r>
                     </a:p>
                   </a:txBody>
@@ -4948,7 +4948,7 @@
                   <a:srgbClr val="2E75B6"/>
                 </a:solidFill>
               </a:rPr>
-              <a:t>Lin R² +0.0160  |  AUC +0.0083</a:t>
+              <a:t>Lin R² +0.0132  |  AUC +0.0008</a:t>
             </a:r>
           </a:p>
         </p:txBody>
@@ -5016,7 +5016,7 @@
                   <a:srgbClr val="008B45"/>
                 </a:solidFill>
               </a:rPr>
-              <a:t>Lin R² +0.0074  |  AUC +0.0015</a:t>
+              <a:t>Lin R² +0.0095  |  AUC +0.0003</a:t>
             </a:r>
           </a:p>
         </p:txBody>
@@ -10889,7 +10889,7 @@
                 <a:gridCol w="1965960"/>
                 <a:gridCol w="1965960"/>
               </a:tblGrid>
-              <a:tr h="333102">
+              <a:tr h="582930">
                 <a:tc>
                   <a:txBody>
                     <a:bodyPr/>
@@ -11023,7 +11023,7 @@
                   </a:tcPr>
                 </a:tc>
               </a:tr>
-              <a:tr h="333102">
+              <a:tr h="582930">
                 <a:tc>
                   <a:txBody>
                     <a:bodyPr/>
@@ -11080,7 +11080,7 @@
                             <a:srgbClr val="1A1A2E"/>
                           </a:solidFill>
                         </a:rPr>
-                        <a:t>+0.1190</a:t>
+                        <a:t>+0.2035</a:t>
                       </a:r>
                     </a:p>
                   </a:txBody>
@@ -11102,7 +11102,7 @@
                             <a:srgbClr val="1A1A2E"/>
                           </a:solidFill>
                         </a:rPr>
-                        <a:t>-2.7900</a:t>
+                        <a:t>-1.1400</a:t>
                       </a:r>
                     </a:p>
                   </a:txBody>
@@ -11124,7 +11124,7 @@
                             <a:srgbClr val="1A1A2E"/>
                           </a:solidFill>
                         </a:rPr>
-                        <a:t>+0.1435</a:t>
+                        <a:t>+0.3052</a:t>
                       </a:r>
                     </a:p>
                   </a:txBody>
@@ -11146,7 +11146,7 @@
                             <a:srgbClr val="1A1A2E"/>
                           </a:solidFill>
                         </a:rPr>
-                        <a:t>-0.0410</a:t>
+                        <a:t>-0.0849</a:t>
                       </a:r>
                     </a:p>
                   </a:txBody>
@@ -11157,7 +11157,7 @@
                   </a:tcPr>
                 </a:tc>
               </a:tr>
-              <a:tr h="333102">
+              <a:tr h="582930">
                 <a:tc>
                   <a:txBody>
                     <a:bodyPr/>
@@ -11171,408 +11171,6 @@
                           </a:solidFill>
                         </a:rPr>
                         <a:t>강남</a:t>
-                      </a:r>
-                    </a:p>
-                  </a:txBody>
-                  <a:tcPr>
-                    <a:solidFill>
-                      <a:srgbClr val="EBFFEB"/>
-                    </a:solidFill>
-                  </a:tcPr>
-                </a:tc>
-                <a:tc>
-                  <a:txBody>
-                    <a:bodyPr/>
-                    <a:lstStyle/>
-                    <a:p>
-                      <a:pPr algn="ctr"/>
-                      <a:r>
-                        <a:rPr sz="1100" b="0">
-                          <a:solidFill>
-                            <a:srgbClr val="1A1A2E"/>
-                          </a:solidFill>
-                        </a:rPr>
-                        <a:t>C2</a:t>
-                      </a:r>
-                    </a:p>
-                  </a:txBody>
-                  <a:tcPr>
-                    <a:solidFill>
-                      <a:srgbClr val="EBFFEB"/>
-                    </a:solidFill>
-                  </a:tcPr>
-                </a:tc>
-                <a:tc>
-                  <a:txBody>
-                    <a:bodyPr/>
-                    <a:lstStyle/>
-                    <a:p>
-                      <a:pPr algn="ctr"/>
-                      <a:r>
-                        <a:rPr sz="1100" b="0">
-                          <a:solidFill>
-                            <a:srgbClr val="1A1A2E"/>
-                          </a:solidFill>
-                        </a:rPr>
-                        <a:t>+0.0480</a:t>
-                      </a:r>
-                    </a:p>
-                  </a:txBody>
-                  <a:tcPr>
-                    <a:solidFill>
-                      <a:srgbClr val="EBFFEB"/>
-                    </a:solidFill>
-                  </a:tcPr>
-                </a:tc>
-                <a:tc>
-                  <a:txBody>
-                    <a:bodyPr/>
-                    <a:lstStyle/>
-                    <a:p>
-                      <a:pPr algn="ctr"/>
-                      <a:r>
-                        <a:rPr sz="1100" b="0">
-                          <a:solidFill>
-                            <a:srgbClr val="1A1A2E"/>
-                          </a:solidFill>
-                        </a:rPr>
-                        <a:t>-1.2000</a:t>
-                      </a:r>
-                    </a:p>
-                  </a:txBody>
-                  <a:tcPr>
-                    <a:solidFill>
-                      <a:srgbClr val="EBFFEB"/>
-                    </a:solidFill>
-                  </a:tcPr>
-                </a:tc>
-                <a:tc>
-                  <a:txBody>
-                    <a:bodyPr/>
-                    <a:lstStyle/>
-                    <a:p>
-                      <a:pPr algn="ctr"/>
-                      <a:r>
-                        <a:rPr sz="1100" b="0">
-                          <a:solidFill>
-                            <a:srgbClr val="1A1A2E"/>
-                          </a:solidFill>
-                        </a:rPr>
-                        <a:t>+0.0510</a:t>
-                      </a:r>
-                    </a:p>
-                  </a:txBody>
-                  <a:tcPr>
-                    <a:solidFill>
-                      <a:srgbClr val="EBFFEB"/>
-                    </a:solidFill>
-                  </a:tcPr>
-                </a:tc>
-                <a:tc>
-                  <a:txBody>
-                    <a:bodyPr/>
-                    <a:lstStyle/>
-                    <a:p>
-                      <a:pPr algn="ctr"/>
-                      <a:r>
-                        <a:rPr sz="1100" b="0">
-                          <a:solidFill>
-                            <a:srgbClr val="1A1A2E"/>
-                          </a:solidFill>
-                        </a:rPr>
-                        <a:t>+0.0806</a:t>
-                      </a:r>
-                    </a:p>
-                  </a:txBody>
-                  <a:tcPr>
-                    <a:solidFill>
-                      <a:srgbClr val="EBFFEB"/>
-                    </a:solidFill>
-                  </a:tcPr>
-                </a:tc>
-              </a:tr>
-              <a:tr h="333102">
-                <a:tc>
-                  <a:txBody>
-                    <a:bodyPr/>
-                    <a:lstStyle/>
-                    <a:p>
-                      <a:pPr algn="l"/>
-                      <a:r>
-                        <a:rPr sz="1100" b="0">
-                          <a:solidFill>
-                            <a:srgbClr val="1A1A2E"/>
-                          </a:solidFill>
-                        </a:rPr>
-                        <a:t>강남</a:t>
-                      </a:r>
-                    </a:p>
-                  </a:txBody>
-                  <a:tcPr>
-                    <a:solidFill>
-                      <a:srgbClr val="EBFFEB"/>
-                    </a:solidFill>
-                  </a:tcPr>
-                </a:tc>
-                <a:tc>
-                  <a:txBody>
-                    <a:bodyPr/>
-                    <a:lstStyle/>
-                    <a:p>
-                      <a:pPr algn="ctr"/>
-                      <a:r>
-                        <a:rPr sz="1100" b="0">
-                          <a:solidFill>
-                            <a:srgbClr val="1A1A2E"/>
-                          </a:solidFill>
-                        </a:rPr>
-                        <a:t>C4</a:t>
-                      </a:r>
-                    </a:p>
-                  </a:txBody>
-                  <a:tcPr>
-                    <a:solidFill>
-                      <a:srgbClr val="EBFFEB"/>
-                    </a:solidFill>
-                  </a:tcPr>
-                </a:tc>
-                <a:tc>
-                  <a:txBody>
-                    <a:bodyPr/>
-                    <a:lstStyle/>
-                    <a:p>
-                      <a:pPr algn="ctr"/>
-                      <a:r>
-                        <a:rPr sz="1100" b="0">
-                          <a:solidFill>
-                            <a:srgbClr val="1A1A2E"/>
-                          </a:solidFill>
-                        </a:rPr>
-                        <a:t>+0.0472</a:t>
-                      </a:r>
-                    </a:p>
-                  </a:txBody>
-                  <a:tcPr>
-                    <a:solidFill>
-                      <a:srgbClr val="EBFFEB"/>
-                    </a:solidFill>
-                  </a:tcPr>
-                </a:tc>
-                <a:tc>
-                  <a:txBody>
-                    <a:bodyPr/>
-                    <a:lstStyle/>
-                    <a:p>
-                      <a:pPr algn="ctr"/>
-                      <a:r>
-                        <a:rPr sz="1100" b="0">
-                          <a:solidFill>
-                            <a:srgbClr val="1A1A2E"/>
-                          </a:solidFill>
-                        </a:rPr>
-                        <a:t>-1.1700</a:t>
-                      </a:r>
-                    </a:p>
-                  </a:txBody>
-                  <a:tcPr>
-                    <a:solidFill>
-                      <a:srgbClr val="EBFFEB"/>
-                    </a:solidFill>
-                  </a:tcPr>
-                </a:tc>
-                <a:tc>
-                  <a:txBody>
-                    <a:bodyPr/>
-                    <a:lstStyle/>
-                    <a:p>
-                      <a:pPr algn="ctr"/>
-                      <a:r>
-                        <a:rPr sz="1100" b="0">
-                          <a:solidFill>
-                            <a:srgbClr val="1A1A2E"/>
-                          </a:solidFill>
-                        </a:rPr>
-                        <a:t>+0.0296</a:t>
-                      </a:r>
-                    </a:p>
-                  </a:txBody>
-                  <a:tcPr>
-                    <a:solidFill>
-                      <a:srgbClr val="EBFFEB"/>
-                    </a:solidFill>
-                  </a:tcPr>
-                </a:tc>
-                <a:tc>
-                  <a:txBody>
-                    <a:bodyPr/>
-                    <a:lstStyle/>
-                    <a:p>
-                      <a:pPr algn="ctr"/>
-                      <a:r>
-                        <a:rPr sz="1100" b="0">
-                          <a:solidFill>
-                            <a:srgbClr val="1A1A2E"/>
-                          </a:solidFill>
-                        </a:rPr>
-                        <a:t>+0.0330</a:t>
-                      </a:r>
-                    </a:p>
-                  </a:txBody>
-                  <a:tcPr>
-                    <a:solidFill>
-                      <a:srgbClr val="EBFFEB"/>
-                    </a:solidFill>
-                  </a:tcPr>
-                </a:tc>
-              </a:tr>
-              <a:tr h="333102">
-                <a:tc>
-                  <a:txBody>
-                    <a:bodyPr/>
-                    <a:lstStyle/>
-                    <a:p>
-                      <a:pPr algn="l"/>
-                      <a:r>
-                        <a:rPr sz="1100" b="0">
-                          <a:solidFill>
-                            <a:srgbClr val="1A1A2E"/>
-                          </a:solidFill>
-                        </a:rPr>
-                        <a:t>신촌</a:t>
-                      </a:r>
-                    </a:p>
-                  </a:txBody>
-                  <a:tcPr>
-                    <a:solidFill>
-                      <a:srgbClr val="D6F5D6"/>
-                    </a:solidFill>
-                  </a:tcPr>
-                </a:tc>
-                <a:tc>
-                  <a:txBody>
-                    <a:bodyPr/>
-                    <a:lstStyle/>
-                    <a:p>
-                      <a:pPr algn="ctr"/>
-                      <a:r>
-                        <a:rPr sz="1100" b="0">
-                          <a:solidFill>
-                            <a:srgbClr val="1A1A2E"/>
-                          </a:solidFill>
-                        </a:rPr>
-                        <a:t>C1</a:t>
-                      </a:r>
-                    </a:p>
-                  </a:txBody>
-                  <a:tcPr>
-                    <a:solidFill>
-                      <a:srgbClr val="D6F5D6"/>
-                    </a:solidFill>
-                  </a:tcPr>
-                </a:tc>
-                <a:tc>
-                  <a:txBody>
-                    <a:bodyPr/>
-                    <a:lstStyle/>
-                    <a:p>
-                      <a:pPr algn="ctr"/>
-                      <a:r>
-                        <a:rPr sz="1100" b="0">
-                          <a:solidFill>
-                            <a:srgbClr val="1A1A2E"/>
-                          </a:solidFill>
-                        </a:rPr>
-                        <a:t>+0.1182</a:t>
-                      </a:r>
-                    </a:p>
-                  </a:txBody>
-                  <a:tcPr>
-                    <a:solidFill>
-                      <a:srgbClr val="D6F5D6"/>
-                    </a:solidFill>
-                  </a:tcPr>
-                </a:tc>
-                <a:tc>
-                  <a:txBody>
-                    <a:bodyPr/>
-                    <a:lstStyle/>
-                    <a:p>
-                      <a:pPr algn="ctr"/>
-                      <a:r>
-                        <a:rPr sz="1100" b="0">
-                          <a:solidFill>
-                            <a:srgbClr val="1A1A2E"/>
-                          </a:solidFill>
-                        </a:rPr>
-                        <a:t>-2.8200</a:t>
-                      </a:r>
-                    </a:p>
-                  </a:txBody>
-                  <a:tcPr>
-                    <a:solidFill>
-                      <a:srgbClr val="D6F5D6"/>
-                    </a:solidFill>
-                  </a:tcPr>
-                </a:tc>
-                <a:tc>
-                  <a:txBody>
-                    <a:bodyPr/>
-                    <a:lstStyle/>
-                    <a:p>
-                      <a:pPr algn="ctr"/>
-                      <a:r>
-                        <a:rPr sz="1100" b="0">
-                          <a:solidFill>
-                            <a:srgbClr val="1A1A2E"/>
-                          </a:solidFill>
-                        </a:rPr>
-                        <a:t>+0.1437</a:t>
-                      </a:r>
-                    </a:p>
-                  </a:txBody>
-                  <a:tcPr>
-                    <a:solidFill>
-                      <a:srgbClr val="D6F5D6"/>
-                    </a:solidFill>
-                  </a:tcPr>
-                </a:tc>
-                <a:tc>
-                  <a:txBody>
-                    <a:bodyPr/>
-                    <a:lstStyle/>
-                    <a:p>
-                      <a:pPr algn="ctr"/>
-                      <a:r>
-                        <a:rPr sz="1100" b="0">
-                          <a:solidFill>
-                            <a:srgbClr val="1A1A2E"/>
-                          </a:solidFill>
-                        </a:rPr>
-                        <a:t>-0.0047</a:t>
-                      </a:r>
-                    </a:p>
-                  </a:txBody>
-                  <a:tcPr>
-                    <a:solidFill>
-                      <a:srgbClr val="D6F5D6"/>
-                    </a:solidFill>
-                  </a:tcPr>
-                </a:tc>
-              </a:tr>
-              <a:tr h="333102">
-                <a:tc>
-                  <a:txBody>
-                    <a:bodyPr/>
-                    <a:lstStyle/>
-                    <a:p>
-                      <a:pPr algn="l"/>
-                      <a:r>
-                        <a:rPr sz="1100" b="0">
-                          <a:solidFill>
-                            <a:srgbClr val="1A1A2E"/>
-                          </a:solidFill>
-                        </a:rPr>
-                        <a:t>신촌</a:t>
                       </a:r>
                     </a:p>
                   </a:txBody>
@@ -11616,7 +11214,7 @@
                             <a:srgbClr val="1A1A2E"/>
                           </a:solidFill>
                         </a:rPr>
-                        <a:t>+0.0971</a:t>
+                        <a:t>+0.0908</a:t>
                       </a:r>
                     </a:p>
                   </a:txBody>
@@ -11638,7 +11236,7 @@
                             <a:srgbClr val="1A1A2E"/>
                           </a:solidFill>
                         </a:rPr>
-                        <a:t>-2.3600</a:t>
+                        <a:t>-0.5300</a:t>
                       </a:r>
                     </a:p>
                   </a:txBody>
@@ -11660,7 +11258,7 @@
                             <a:srgbClr val="1A1A2E"/>
                           </a:solidFill>
                         </a:rPr>
-                        <a:t>+0.1061</a:t>
+                        <a:t>+0.0902</a:t>
                       </a:r>
                     </a:p>
                   </a:txBody>
@@ -11682,7 +11280,7 @@
                             <a:srgbClr val="1A1A2E"/>
                           </a:solidFill>
                         </a:rPr>
-                        <a:t>+0.0150</a:t>
+                        <a:t>+0.0967</a:t>
                       </a:r>
                     </a:p>
                   </a:txBody>
@@ -11693,7 +11291,7 @@
                   </a:tcPr>
                 </a:tc>
               </a:tr>
-              <a:tr h="333108">
+              <a:tr h="582930">
                 <a:tc>
                   <a:txBody>
                     <a:bodyPr/>
@@ -11706,7 +11304,7 @@
                             <a:srgbClr val="1A1A2E"/>
                           </a:solidFill>
                         </a:rPr>
-                        <a:t>신촌</a:t>
+                        <a:t>강남</a:t>
                       </a:r>
                     </a:p>
                   </a:txBody>
@@ -11750,7 +11348,7 @@
                             <a:srgbClr val="1A1A2E"/>
                           </a:solidFill>
                         </a:rPr>
-                        <a:t>+0.0990</a:t>
+                        <a:t>+0.0940</a:t>
                       </a:r>
                     </a:p>
                   </a:txBody>
@@ -11772,7 +11370,7 @@
                             <a:srgbClr val="1A1A2E"/>
                           </a:solidFill>
                         </a:rPr>
-                        <a:t>-2.3600</a:t>
+                        <a:t>-0.5400</a:t>
                       </a:r>
                     </a:p>
                   </a:txBody>
@@ -11794,7 +11392,7 @@
                             <a:srgbClr val="1A1A2E"/>
                           </a:solidFill>
                         </a:rPr>
-                        <a:t>+0.0745</a:t>
+                        <a:t>+0.0750</a:t>
                       </a:r>
                     </a:p>
                   </a:txBody>
@@ -11816,7 +11414,7 @@
                             <a:srgbClr val="1A1A2E"/>
                           </a:solidFill>
                         </a:rPr>
-                        <a:t>+0.0403</a:t>
+                        <a:t>+0.0461</a:t>
                       </a:r>
                     </a:p>
                   </a:txBody>
